--- a/Assignment9_StrategicSynthesis.pptx
+++ b/Assignment9_StrategicSynthesis.pptx
@@ -3257,7 +3257,7 @@
           <a:lstStyle/>
           <a:p>
             <a:pPr>
-              <a:defRPr sz="1000" b="1">
+              <a:defRPr sz="1200" b="1">
                 <a:solidFill>
                   <a:srgbClr val="293E9C"/>
                 </a:solidFill>
@@ -3304,11 +3304,11 @@
               </a:defRPr>
             </a:pPr>
             <a:r>
-              <a:t>Downtown San Diego Unsheltered Homelessness:</a:t>
+              <a:t>Downtown Homelessness:</a:t>
             </a:r>
             <a:br/>
             <a:r>
-              <a:t>Strategic Synthesis &amp; Policy Roadmap (2017–2026)</a:t>
+              <a:t>Executive Strategic Roadmap (2017–2026)</a:t>
             </a:r>
           </a:p>
           <a:p>
@@ -3321,7 +3321,7 @@
               </a:defRPr>
             </a:pPr>
             <a:r>
-              <a:t>Longitudinal Econometrics, Spatial Panel Dynamics, Machine Learning Forecasting &amp; Regional Policy Impacts</a:t>
+              <a:t>Econometrics, Spatial Dynamics, ML Forecasting &amp; Regional Policy</a:t>
             </a:r>
           </a:p>
         </p:txBody>
@@ -3395,7 +3395,7 @@
               <a:spcAft>
                 <a:spcPts val="200"/>
               </a:spcAft>
-              <a:defRPr sz="950" b="1">
+              <a:defRPr sz="1150" b="1">
                 <a:solidFill>
                   <a:srgbClr val="3A58E4"/>
                 </a:solidFill>
@@ -3408,7 +3408,7 @@
           </a:p>
           <a:p>
             <a:pPr>
-              <a:defRPr sz="900">
+              <a:defRPr sz="1100">
                 <a:solidFill>
                   <a:srgbClr val="1D1F26"/>
                 </a:solidFill>
@@ -3416,11 +3416,11 @@
               </a:defRPr>
             </a:pPr>
             <a:r>
-              <a:t>Data Science Alliance (DSA) in partnership with DSDP and RTFH</a:t>
+              <a:t>DSA, DSDP, RTFH</a:t>
             </a:r>
             <a:br/>
             <a:r>
-              <a:t>Lead Analyst: Kyaw Soe Lwin | Project Lead: Adir Mancebo Jr.</a:t>
+              <a:t>Lead: K.S. Lwin | Proj Lead: A. Mancebo Jr.</a:t>
             </a:r>
           </a:p>
         </p:txBody>
@@ -3451,7 +3451,7 @@
               <a:spcAft>
                 <a:spcPts val="200"/>
               </a:spcAft>
-              <a:defRPr sz="950" b="1">
+              <a:defRPr sz="1150" b="1">
                 <a:solidFill>
                   <a:srgbClr val="3A58E4"/>
                 </a:solidFill>
@@ -3464,7 +3464,7 @@
           </a:p>
           <a:p>
             <a:pPr>
-              <a:defRPr sz="900">
+              <a:defRPr sz="1100">
                 <a:solidFill>
                   <a:srgbClr val="1D1F26"/>
                 </a:solidFill>
@@ -3472,11 +3472,11 @@
               </a:defRPr>
             </a:pPr>
             <a:r>
-              <a:t>9 Years of Monthly Field Counts (2017–2025) across 382 Blocks</a:t>
+              <a:t>108 months of counts (2017-2025)</a:t>
             </a:r>
             <a:br/>
             <a:r>
-              <a:t>Point-in-Time (PIT) Regional Censuses (2017–2025)</a:t>
+              <a:t>Regional PIT censuses</a:t>
             </a:r>
           </a:p>
         </p:txBody>
@@ -3507,7 +3507,7 @@
               <a:spcAft>
                 <a:spcPts val="200"/>
               </a:spcAft>
-              <a:defRPr sz="950" b="1">
+              <a:defRPr sz="1150" b="1">
                 <a:solidFill>
                   <a:srgbClr val="3A58E4"/>
                 </a:solidFill>
@@ -3520,7 +3520,7 @@
           </a:p>
           <a:p>
             <a:pPr>
-              <a:defRPr sz="900">
+              <a:defRPr sz="1100">
                 <a:solidFill>
                   <a:srgbClr val="1D1F26"/>
                 </a:solidFill>
@@ -3528,7 +3528,7 @@
               </a:defRPr>
             </a:pPr>
             <a:r>
-              <a:t>Spatial Getis-Ord Gi* • 5-Fold Walk-Forward XGBoost ML • Policy Regime OLS • 4 Public Communication Rules</a:t>
+              <a:t>Spatial Gi* • Walk-Forward CV • OLS Regime • 4 Comm Rules</a:t>
             </a:r>
           </a:p>
         </p:txBody>
@@ -3716,7 +3716,7 @@
               <a:spcAft>
                 <a:spcPts val="200"/>
               </a:spcAft>
-              <a:defRPr sz="1000" b="1">
+              <a:defRPr sz="1200" b="1">
                 <a:solidFill>
                   <a:srgbClr val="3A58E4"/>
                 </a:solidFill>
@@ -3737,7 +3737,7 @@
               </a:defRPr>
             </a:pPr>
             <a:r>
-              <a:t>The Regional Displacement Paradox: Downtown Collapse vs. Countywide Record</a:t>
+              <a:t>Regional Displacement: Downtown Drops vs County Highs</a:t>
             </a:r>
           </a:p>
         </p:txBody>
@@ -4058,22 +4058,22 @@
               </a:spcAft>
             </a:pPr>
             <a:r>
-              <a:rPr sz="1000" b="1">
+              <a:rPr sz="1200" b="1">
                 <a:solidFill>
                   <a:srgbClr val="3A58E4"/>
                 </a:solidFill>
                 <a:latin typeface="Segoe UI"/>
               </a:rPr>
-              <a:t>• Downtown Share Collapsed: </a:t>
-            </a:r>
-            <a:r>
-              <a:rPr sz="919">
+              <a:t>• Share Plunged: </a:t>
+            </a:r>
+            <a:r>
+              <a:rPr sz="1120">
                 <a:solidFill>
                   <a:srgbClr val="1D1F26"/>
                 </a:solidFill>
                 <a:latin typeface="Segoe UI"/>
               </a:rPr>
-              <a:t>Downtown's share of countywide unsheltered homelessness plunged from 37.5% in January 2023 to 14.9% in January 2025.</a:t>
+              <a:t>Downtown's share of county unsheltered fell to 14.9%.</a:t>
             </a:r>
           </a:p>
           <a:p>
@@ -4083,22 +4083,22 @@
               </a:spcAft>
             </a:pPr>
             <a:r>
-              <a:rPr sz="1000" b="1">
+              <a:rPr sz="1200" b="1">
                 <a:solidFill>
                   <a:srgbClr val="3A58E4"/>
                 </a:solidFill>
                 <a:latin typeface="Segoe UI"/>
               </a:rPr>
-              <a:t>• Countywide Homelessness Hit Record: </a:t>
-            </a:r>
-            <a:r>
-              <a:rPr sz="919">
+              <a:t>• County Record: </a:t>
+            </a:r>
+            <a:r>
+              <a:rPr sz="1120">
                 <a:solidFill>
                   <a:srgbClr val="1D1F26"/>
                 </a:solidFill>
                 <a:latin typeface="Segoe UI"/>
               </a:rPr>
-              <a:t>Simultaneously, the RTFH Point-in-Time count recorded an all-time countywide peak of 6,110 unsheltered individuals in 2024 (and 5,714 in 2025).</a:t>
+              <a:t>Countywide numbers reached 6,110 (2024) and 5,714 (2025).</a:t>
             </a:r>
           </a:p>
           <a:p>
@@ -4108,22 +4108,22 @@
               </a:spcAft>
             </a:pPr>
             <a:r>
-              <a:rPr sz="1000" b="1">
+              <a:rPr sz="1200" b="1">
                 <a:solidFill>
                   <a:srgbClr val="3A58E4"/>
                 </a:solidFill>
                 <a:latin typeface="Segoe UI"/>
               </a:rPr>
-              <a:t>• Displacement, Not Elimination: </a:t>
-            </a:r>
-            <a:r>
-              <a:rPr sz="919">
+              <a:t>• Displacement: </a:t>
+            </a:r>
+            <a:r>
+              <a:rPr sz="1120">
                 <a:solidFill>
                   <a:srgbClr val="1D1F26"/>
                 </a:solidFill>
                 <a:latin typeface="Segoe UI"/>
               </a:rPr>
-              <a:t>The Unsafe Camping Ordinance successfully reduced visible encampments in commercial corridors, but individuals were dispersed into riverbeds, freeway rights-of-way, and neighboring jurisdictions (El Cajon, Chula Vista, National City).</a:t>
+              <a:t>Downtown drops align with regional spikes. The crisis moved.</a:t>
             </a:r>
           </a:p>
           <a:p>
@@ -4133,22 +4133,22 @@
               </a:spcAft>
             </a:pPr>
             <a:r>
-              <a:rPr sz="1000" b="1">
+              <a:rPr sz="1200" b="1">
                 <a:solidFill>
                   <a:srgbClr val="3A58E4"/>
                 </a:solidFill>
                 <a:latin typeface="Segoe UI"/>
               </a:rPr>
-              <a:t>• Regional Coordination Required: </a:t>
-            </a:r>
-            <a:r>
-              <a:rPr sz="919">
+              <a:t>• Data Limits: </a:t>
+            </a:r>
+            <a:r>
+              <a:rPr sz="1120">
                 <a:solidFill>
                   <a:srgbClr val="1D1F26"/>
                 </a:solidFill>
                 <a:latin typeface="Segoe UI"/>
               </a:rPr>
-              <a:t>City-centric enforcement without countywide shelter capacity shifts the burden rather than solving the systemic crisis.</a:t>
+              <a:t>Reflects macro divergence, individual tracking is unavailable.</a:t>
             </a:r>
           </a:p>
         </p:txBody>
@@ -4336,7 +4336,7 @@
               <a:spcAft>
                 <a:spcPts val="200"/>
               </a:spcAft>
-              <a:defRPr sz="1000" b="1">
+              <a:defRPr sz="1200" b="1">
                 <a:solidFill>
                   <a:srgbClr val="3A58E4"/>
                 </a:solidFill>
@@ -4357,7 +4357,7 @@
               </a:defRPr>
             </a:pPr>
             <a:r>
-              <a:t>Countywide Macro Estimation Model &amp; Mandatory Communication Rules</a:t>
+              <a:t>Macro Model &amp; 4 Communication Rules</a:t>
             </a:r>
           </a:p>
         </p:txBody>
@@ -4609,22 +4609,22 @@
               </a:spcAft>
             </a:pPr>
             <a:r>
-              <a:rPr sz="950" b="1">
+              <a:rPr sz="1150" b="1">
                 <a:solidFill>
                   <a:srgbClr val="3A58E4"/>
                 </a:solidFill>
                 <a:latin typeface="Segoe UI"/>
               </a:rPr>
-              <a:t>• Constant-Ratio Assumption Rejected: </a:t>
-            </a:r>
-            <a:r>
-              <a:rPr sz="900">
+              <a:t>• Ratio Rejected: </a:t>
+            </a:r>
+            <a:r>
+              <a:rPr sz="1100">
                 <a:solidFill>
                   <a:srgbClr val="1D1F26"/>
                 </a:solidFill>
                 <a:latin typeface="Segoe UI"/>
               </a:rPr>
-              <a:t>One-Way ANOVA decisively rejects ratio stability across regimes: F = 66.51, p = 0.0002, eta^2 = 0.9638. A constant-ratio multiplier creates up to +96.2% error!</a:t>
+              <a:t>Fixed ratios fail across policy regimes (ANOVA p=0.0002).</a:t>
             </a:r>
           </a:p>
           <a:p>
@@ -4634,23 +4634,22 @@
               </a:spcAft>
             </a:pPr>
             <a:r>
-              <a:rPr sz="950" b="1">
+              <a:rPr sz="1150" b="1">
                 <a:solidFill>
                   <a:srgbClr val="3A58E4"/>
                 </a:solidFill>
                 <a:latin typeface="Segoe UI"/>
               </a:rPr>
-              <a:t>• Econometric Equation: </a:t>
-            </a:r>
-            <a:r>
-              <a:rPr sz="900">
+              <a:t>• Model Equation: </a:t>
+            </a:r>
+            <a:r>
+              <a:rPr sz="1100">
                 <a:solidFill>
                   <a:srgbClr val="1D1F26"/>
                 </a:solidFill>
                 <a:latin typeface="Segoe UI"/>
               </a:rPr>
-              <a:t>Y = 4,513.26 + 0.1859 * X + 1,225.04 * D_post
-Where X = Downtown monthly count, D_post = 1 under active Camping Ordinance enforcement.</a:t>
+              <a:t>Y = 4,513 + 0.186X + 1,225*D_post (Accounts for 2024/25).</a:t>
             </a:r>
           </a:p>
           <a:p>
@@ -4660,22 +4659,22 @@
               </a:spcAft>
             </a:pPr>
             <a:r>
-              <a:rPr sz="950" b="1">
+              <a:rPr sz="1150" b="1">
                 <a:solidFill>
                   <a:srgbClr val="3A58E4"/>
                 </a:solidFill>
                 <a:latin typeface="Segoe UI"/>
               </a:rPr>
-              <a:t>• Model Goodness-of-Fit: </a:t>
-            </a:r>
-            <a:r>
-              <a:rPr sz="900">
+              <a:t>• Diagnostics: </a:t>
+            </a:r>
+            <a:r>
+              <a:rPr sz="1100">
                 <a:solidFill>
                   <a:srgbClr val="1D1F26"/>
                 </a:solidFill>
                 <a:latin typeface="Segoe UI"/>
               </a:rPr>
-              <a:t>R^2 = 0.9638 | Adj R^2 = 0.9493 | LOOCV RMSE = 815.32 | Signed Bias = -0.34%.</a:t>
+              <a:t>R²=0.50. Slope and D_post are not strictly significant at 5%.</a:t>
             </a:r>
           </a:p>
           <a:p>
@@ -4685,23 +4684,22 @@
               </a:spcAft>
             </a:pPr>
             <a:r>
-              <a:rPr sz="950" b="1">
+              <a:rPr sz="1150" b="1">
                 <a:solidFill>
                   <a:srgbClr val="3A58E4"/>
                 </a:solidFill>
                 <a:latin typeface="Segoe UI"/>
               </a:rPr>
-              <a:t>• Current County Estimate (Dec 2025): </a:t>
-            </a:r>
-            <a:r>
-              <a:rPr sz="900">
+              <a:t>• Current Estimate: </a:t>
+            </a:r>
+            <a:r>
+              <a:rPr sz="1100">
                 <a:solidFill>
                   <a:srgbClr val="1D1F26"/>
                 </a:solidFill>
                 <a:latin typeface="Segoe UI"/>
               </a:rPr>
-              <a:t>5,900 [95% PI: 3,900 to 8,000 individuals]
-Calibrated margin of error is +/- 2,050 individuals (+/- 35%) using exact Student's t distribution (df=5).</a:t>
+              <a:t>5,900 [95% PI: 3,900 to 8,000]. Margin of error is ±35%.</a:t>
             </a:r>
           </a:p>
         </p:txBody>
@@ -4795,23 +4793,23 @@
               </a:spcAft>
             </a:pPr>
             <a:r>
-              <a:rPr sz="950" b="1">
+              <a:rPr sz="1150" b="1">
                 <a:solidFill>
                   <a:srgbClr val="293E9C"/>
                 </a:solidFill>
                 <a:latin typeface="Segoe UI"/>
               </a:rPr>
-              <a:t>Rule 1: Prohibit Raw Single-Point Precision
+              <a:t>Rule 1: No False Precision
 </a:t>
             </a:r>
             <a:r>
-              <a:rPr sz="900">
+              <a:rPr sz="1100">
                 <a:solidFill>
                   <a:srgbClr val="1D1F26"/>
                 </a:solidFill>
                 <a:latin typeface="Segoe UI"/>
               </a:rPr>
-              <a:t>Never publish uncalibrated single figures like '5,921'. False precision misleads the public and damages institutional credibility.</a:t>
+              <a:t>Stop using raw single points (e.g., '5,921'). It damages credibility.</a:t>
             </a:r>
           </a:p>
           <a:p>
@@ -4821,23 +4819,23 @@
               </a:spcAft>
             </a:pPr>
             <a:r>
-              <a:rPr sz="950" b="1">
+              <a:rPr sz="1150" b="1">
                 <a:solidFill>
                   <a:srgbClr val="293E9C"/>
                 </a:solidFill>
                 <a:latin typeface="Segoe UI"/>
               </a:rPr>
-              <a:t>Rule 2: Mandate Rounding to Nearest 100
+              <a:t>Rule 2: Round to 100
 </a:t>
             </a:r>
             <a:r>
-              <a:rPr sz="900">
+              <a:rPr sz="1100">
                 <a:solidFill>
                   <a:srgbClr val="1D1F26"/>
                 </a:solidFill>
                 <a:latin typeface="Segoe UI"/>
               </a:rPr>
-              <a:t>Always round estimated point totals to the nearest 100 individuals (e.g. mandate '5,900' instead of '5,921').</a:t>
+              <a:t>Always round estimates to the nearest hundred.</a:t>
             </a:r>
           </a:p>
           <a:p>
@@ -4847,23 +4845,23 @@
               </a:spcAft>
             </a:pPr>
             <a:r>
-              <a:rPr sz="950" b="1">
+              <a:rPr sz="1150" b="1">
                 <a:solidFill>
                   <a:srgbClr val="293E9C"/>
                 </a:solidFill>
                 <a:latin typeface="Segoe UI"/>
               </a:rPr>
-              <a:t>Rule 3: Always Publish Calibrated 95% Interval
+              <a:t>Rule 3: Show 95% Interval
 </a:t>
             </a:r>
             <a:r>
-              <a:rPr sz="900">
+              <a:rPr sz="1100">
                 <a:solidFill>
                   <a:srgbClr val="1D1F26"/>
                 </a:solidFill>
                 <a:latin typeface="Segoe UI"/>
               </a:rPr>
-              <a:t>Every headline figure MUST be accompanied by its calibrated Student's t prediction interval: '5,900 [3,900 to 8,000]'.</a:t>
+              <a:t>Mandate prediction ranges: '5,900 [3,900 to 8,000]'.</a:t>
             </a:r>
           </a:p>
           <a:p>
@@ -4873,23 +4871,23 @@
               </a:spcAft>
             </a:pPr>
             <a:r>
-              <a:rPr sz="950" b="1">
+              <a:rPr sz="1150" b="1">
                 <a:solidFill>
                   <a:srgbClr val="293E9C"/>
                 </a:solidFill>
                 <a:latin typeface="Segoe UI"/>
               </a:rPr>
-              <a:t>Rule 4: Mandatory Policy Regime Disclosure
+              <a:t>Rule 4: Disclose Regimes
 </a:t>
             </a:r>
             <a:r>
-              <a:rPr sz="900">
+              <a:rPr sz="1100">
                 <a:solidFill>
                   <a:srgbClr val="1D1F26"/>
                 </a:solidFill>
                 <a:latin typeface="Segoe UI"/>
               </a:rPr>
-              <a:t>Public statements must explicitly disclose that the +1,225 adjustment accounts for displacement following the July 2023 Camping Ordinance.</a:t>
+              <a:t>Explicitly state assumptions (e.g., assumes post-2023 enforcement holds).</a:t>
             </a:r>
           </a:p>
         </p:txBody>
@@ -5077,7 +5075,7 @@
               <a:spcAft>
                 <a:spcPts val="200"/>
               </a:spcAft>
-              <a:defRPr sz="1000" b="1">
+              <a:defRPr sz="1200" b="1">
                 <a:solidFill>
                   <a:srgbClr val="3A58E4"/>
                 </a:solidFill>
@@ -5098,7 +5096,7 @@
               </a:defRPr>
             </a:pPr>
             <a:r>
-              <a:t>Municipal Policy Action Roadmap: 30-Day, 1-Year, and 3-Year Horizons</a:t>
+              <a:t>Policy Roadmap: Recommendations (R1–R8)</a:t>
             </a:r>
           </a:p>
         </p:txBody>
@@ -5383,15 +5381,15 @@
               </a:defRPr>
             </a:pPr>
             <a:r>
-              <a:t>IMMEDIATE ACTION (30–90 DAYS)</a:t>
+              <a:t>IMMEDIATE (0–3 MONTHS)</a:t>
             </a:r>
           </a:p>
           <a:p>
             <a:pPr>
               <a:spcAft>
-                <a:spcPts val="1000"/>
+                <a:spcPts val="1200"/>
               </a:spcAft>
-              <a:defRPr sz="900" b="1">
+              <a:defRPr sz="1100" b="1">
                 <a:solidFill>
                   <a:srgbClr val="647491"/>
                 </a:solidFill>
@@ -5399,7 +5397,7 @@
               </a:defRPr>
             </a:pPr>
             <a:r>
-              <a:t>High-Frequency Outreach &amp; Tool Deployment</a:t>
+              <a:t>Outreach &amp; Governance</a:t>
             </a:r>
           </a:p>
           <a:p>
@@ -5409,22 +5407,22 @@
               </a:spcAft>
             </a:pPr>
             <a:r>
-              <a:rPr sz="950" b="1">
+              <a:rPr sz="1150" b="1">
                 <a:solidFill>
                   <a:srgbClr val="1D1F26"/>
                 </a:solidFill>
                 <a:latin typeface="Segoe UI"/>
               </a:rPr>
-              <a:t>• Mobile Sanitation: </a:t>
-            </a:r>
-            <a:r>
-              <a:rPr sz="880">
+              <a:t>• R1. Hotspots: </a:t>
+            </a:r>
+            <a:r>
+              <a:rPr sz="1080">
                 <a:solidFill>
                   <a:srgbClr val="647491"/>
                 </a:solidFill>
                 <a:latin typeface="Segoe UI"/>
               </a:rPr>
-              <a:t>Deploy intensive hygiene and mobile restrooms directly to the top 10 persistent hotspot blocks (led by 16th &amp; Imperial).</a:t>
+              <a:t>Target 16th-17th &amp; Imperial for rapid outreach.</a:t>
             </a:r>
           </a:p>
           <a:p>
@@ -5434,22 +5432,22 @@
               </a:spcAft>
             </a:pPr>
             <a:r>
-              <a:rPr sz="950" b="1">
+              <a:rPr sz="1150" b="1">
                 <a:solidFill>
                   <a:srgbClr val="1D1F26"/>
                 </a:solidFill>
                 <a:latin typeface="Segoe UI"/>
               </a:rPr>
-              <a:t>• Dashboard Deployment: </a:t>
-            </a:r>
-            <a:r>
-              <a:rPr sz="880">
+              <a:t>• R2. Range Planning: </a:t>
+            </a:r>
+            <a:r>
+              <a:rPr sz="1080">
                 <a:solidFill>
                   <a:srgbClr val="647491"/>
                 </a:solidFill>
                 <a:latin typeface="Segoe UI"/>
               </a:rPr>
-              <a:t>Provide City Council and County Supervisors with live dashboard access for real-time surveillance.</a:t>
+              <a:t>Enforce Rules 1-4 for all public numbers.</a:t>
             </a:r>
           </a:p>
           <a:p>
@@ -5459,22 +5457,22 @@
               </a:spcAft>
             </a:pPr>
             <a:r>
-              <a:rPr sz="950" b="1">
+              <a:rPr sz="1150" b="1">
                 <a:solidFill>
                   <a:srgbClr val="1D1F26"/>
                 </a:solidFill>
                 <a:latin typeface="Segoe UI"/>
               </a:rPr>
-              <a:t>• Target Metric: </a:t>
-            </a:r>
-            <a:r>
-              <a:rPr sz="880">
+              <a:t>• R3. Boundary Clarity: </a:t>
+            </a:r>
+            <a:r>
+              <a:rPr sz="1080">
                 <a:solidFill>
                   <a:srgbClr val="647491"/>
                 </a:solidFill>
                 <a:latin typeface="Segoe UI"/>
               </a:rPr>
-              <a:t>Zero unsheltered growth on top 5 hotspot blocks.</a:t>
+              <a:t>Disclose 261 vs 382-block footprint metrics.</a:t>
             </a:r>
           </a:p>
           <a:p>
@@ -5484,22 +5482,22 @@
               </a:spcAft>
             </a:pPr>
             <a:r>
-              <a:rPr sz="950" b="1">
+              <a:rPr sz="1150" b="1">
                 <a:solidFill>
                   <a:srgbClr val="1D1F26"/>
                 </a:solidFill>
                 <a:latin typeface="Segoe UI"/>
               </a:rPr>
-              <a:t>• Lead: </a:t>
-            </a:r>
-            <a:r>
-              <a:rPr sz="880">
+              <a:t>• Leaders: </a:t>
+            </a:r>
+            <a:r>
+              <a:rPr sz="1080">
                 <a:solidFill>
                   <a:srgbClr val="647491"/>
                 </a:solidFill>
                 <a:latin typeface="Segoe UI"/>
               </a:rPr>
-              <a:t>City Homelessness Strategies &amp; DSDP.</a:t>
+              <a:t>City Strategies, DSDP.</a:t>
             </a:r>
           </a:p>
         </p:txBody>
@@ -5626,15 +5624,15 @@
               </a:defRPr>
             </a:pPr>
             <a:r>
-              <a:t>MEDIUM-TERM (6–12 MONTHS)</a:t>
+              <a:t>MEDIUM (6–12 MONTHS)</a:t>
             </a:r>
           </a:p>
           <a:p>
             <a:pPr>
               <a:spcAft>
-                <a:spcPts val="1000"/>
+                <a:spcPts val="1200"/>
               </a:spcAft>
-              <a:defRPr sz="900" b="1">
+              <a:defRPr sz="1100" b="1">
                 <a:solidFill>
                   <a:srgbClr val="647491"/>
                 </a:solidFill>
@@ -5642,7 +5640,7 @@
               </a:defRPr>
             </a:pPr>
             <a:r>
-              <a:t>Safe Sleeping &amp; Regional Containment</a:t>
+              <a:t>Data &amp; Validation</a:t>
             </a:r>
           </a:p>
           <a:p>
@@ -5652,22 +5650,22 @@
               </a:spcAft>
             </a:pPr>
             <a:r>
-              <a:rPr sz="950" b="1">
+              <a:rPr sz="1150" b="1">
                 <a:solidFill>
                   <a:srgbClr val="1D1F26"/>
                 </a:solidFill>
                 <a:latin typeface="Segoe UI"/>
               </a:rPr>
-              <a:t>• Scale Safe Sleeping: </a:t>
-            </a:r>
-            <a:r>
-              <a:rPr sz="880">
+              <a:t>• R4. Component Data: </a:t>
+            </a:r>
+            <a:r>
+              <a:rPr sz="1080">
                 <a:solidFill>
                   <a:srgbClr val="647491"/>
                 </a:solidFill>
                 <a:latin typeface="Segoe UI"/>
               </a:rPr>
-              <a:t>Expand Safe Sleeping Sites by 800 beds to capture the -24% optimistic scenario (~670 individuals).</a:t>
+              <a:t>Mandate full tent/vehicle component reporting.</a:t>
             </a:r>
           </a:p>
           <a:p>
@@ -5677,22 +5675,22 @@
               </a:spcAft>
             </a:pPr>
             <a:r>
-              <a:rPr sz="950" b="1">
+              <a:rPr sz="1150" b="1">
                 <a:solidFill>
                   <a:srgbClr val="1D1F26"/>
                 </a:solidFill>
                 <a:latin typeface="Segoe UI"/>
               </a:rPr>
-              <a:t>• Regional Taskforce: </a:t>
-            </a:r>
-            <a:r>
-              <a:rPr sz="880">
+              <a:t>• R5. Displacement: </a:t>
+            </a:r>
+            <a:r>
+              <a:rPr sz="1080">
                 <a:solidFill>
                   <a:srgbClr val="647491"/>
                 </a:solidFill>
                 <a:latin typeface="Segoe UI"/>
               </a:rPr>
-              <a:t>Establish joint intervention protocol with East &amp; South County to intercept displaced encampments.</a:t>
+              <a:t>Verify cross-border regional movement.</a:t>
             </a:r>
           </a:p>
           <a:p>
@@ -5702,22 +5700,22 @@
               </a:spcAft>
             </a:pPr>
             <a:r>
-              <a:rPr sz="950" b="1">
+              <a:rPr sz="1150" b="1">
                 <a:solidFill>
                   <a:srgbClr val="1D1F26"/>
                 </a:solidFill>
                 <a:latin typeface="Segoe UI"/>
               </a:rPr>
-              <a:t>• Target Metric: </a:t>
-            </a:r>
-            <a:r>
-              <a:rPr sz="880">
+              <a:t>• R6. Retraining: </a:t>
+            </a:r>
+            <a:r>
+              <a:rPr sz="1080">
                 <a:solidFill>
                   <a:srgbClr val="647491"/>
                 </a:solidFill>
                 <a:latin typeface="Segoe UI"/>
               </a:rPr>
-              <a:t>Sub-700 downtown count sustained 6+ months.</a:t>
+              <a:t>Update OLS models with 2026 PIT data.</a:t>
             </a:r>
           </a:p>
           <a:p>
@@ -5727,22 +5725,22 @@
               </a:spcAft>
             </a:pPr>
             <a:r>
-              <a:rPr sz="950" b="1">
+              <a:rPr sz="1150" b="1">
                 <a:solidFill>
                   <a:srgbClr val="1D1F26"/>
                 </a:solidFill>
                 <a:latin typeface="Segoe UI"/>
               </a:rPr>
-              <a:t>• Lead: </a:t>
-            </a:r>
-            <a:r>
-              <a:rPr sz="880">
+              <a:t>• R7. Shelter Data: </a:t>
+            </a:r>
+            <a:r>
+              <a:rPr sz="1080">
                 <a:solidFill>
                   <a:srgbClr val="647491"/>
                 </a:solidFill>
                 <a:latin typeface="Segoe UI"/>
               </a:rPr>
-              <a:t>City of San Diego, RTFH, Caltrans.</a:t>
+              <a:t>Integrate real Housing Inventory Count (HIC).</a:t>
             </a:r>
           </a:p>
         </p:txBody>
@@ -5875,9 +5873,9 @@
           <a:p>
             <a:pPr>
               <a:spcAft>
-                <a:spcPts val="1000"/>
+                <a:spcPts val="1200"/>
               </a:spcAft>
-              <a:defRPr sz="900" b="1">
+              <a:defRPr sz="1100" b="1">
                 <a:solidFill>
                   <a:srgbClr val="647491"/>
                 </a:solidFill>
@@ -5885,7 +5883,7 @@
               </a:defRPr>
             </a:pPr>
             <a:r>
-              <a:t>System Integration &amp; Housing Exits</a:t>
+              <a:t>Digitization &amp; Infrastructure</a:t>
             </a:r>
           </a:p>
           <a:p>
@@ -5895,22 +5893,22 @@
               </a:spcAft>
             </a:pPr>
             <a:r>
-              <a:rPr sz="950" b="1">
+              <a:rPr sz="1150" b="1">
                 <a:solidFill>
                   <a:srgbClr val="1D1F26"/>
                 </a:solidFill>
                 <a:latin typeface="Segoe UI"/>
               </a:rPr>
-              <a:t>• Regional HMIS 2.0: </a:t>
-            </a:r>
-            <a:r>
-              <a:rPr sz="880">
+              <a:t>• R8. Digitize Maps: </a:t>
+            </a:r>
+            <a:r>
+              <a:rPr sz="1080">
                 <a:solidFill>
                   <a:srgbClr val="647491"/>
                 </a:solidFill>
                 <a:latin typeface="Segoe UI"/>
               </a:rPr>
-              <a:t>Deploy integrated bed reservation system with real-time shelter vacancy tracking across all regional providers.</a:t>
+              <a:t>Digitize remaining 78 monthly block maps.</a:t>
             </a:r>
           </a:p>
           <a:p>
@@ -5920,22 +5918,22 @@
               </a:spcAft>
             </a:pPr>
             <a:r>
-              <a:rPr sz="950" b="1">
+              <a:rPr sz="1150" b="1">
                 <a:solidFill>
                   <a:srgbClr val="1D1F26"/>
                 </a:solidFill>
                 <a:latin typeface="Segoe UI"/>
               </a:rPr>
-              <a:t>• Permanent Housing: </a:t>
-            </a:r>
-            <a:r>
-              <a:rPr sz="880">
+              <a:t>• Regional HMIS: </a:t>
+            </a:r>
+            <a:r>
+              <a:rPr sz="1080">
                 <a:solidFill>
                   <a:srgbClr val="647491"/>
                 </a:solidFill>
                 <a:latin typeface="Segoe UI"/>
               </a:rPr>
-              <a:t>Fund 1,500 permanent supportive housing units with tenancy retention services.</a:t>
+              <a:t>Unify real-time city and county bed tracking.</a:t>
             </a:r>
           </a:p>
           <a:p>
@@ -5945,22 +5943,22 @@
               </a:spcAft>
             </a:pPr>
             <a:r>
-              <a:rPr sz="950" b="1">
+              <a:rPr sz="1150" b="1">
                 <a:solidFill>
                   <a:srgbClr val="1D1F26"/>
                 </a:solidFill>
                 <a:latin typeface="Segoe UI"/>
               </a:rPr>
-              <a:t>• Target Metric: </a:t>
-            </a:r>
-            <a:r>
-              <a:rPr sz="880">
+              <a:t>• True Evaluation: </a:t>
+            </a:r>
+            <a:r>
+              <a:rPr sz="1080">
                 <a:solidFill>
                   <a:srgbClr val="647491"/>
                 </a:solidFill>
                 <a:latin typeface="Segoe UI"/>
               </a:rPr>
-              <a:t>25%+ reduction in countywide unsheltered PIT.</a:t>
+              <a:t>Measure regional outcomes, not just local clearing.</a:t>
             </a:r>
           </a:p>
           <a:p>
@@ -5970,22 +5968,22 @@
               </a:spcAft>
             </a:pPr>
             <a:r>
-              <a:rPr sz="950" b="1">
+              <a:rPr sz="1150" b="1">
                 <a:solidFill>
                   <a:srgbClr val="1D1F26"/>
                 </a:solidFill>
                 <a:latin typeface="Segoe UI"/>
               </a:rPr>
-              <a:t>• Lead: </a:t>
-            </a:r>
-            <a:r>
-              <a:rPr sz="880">
+              <a:t>• Leaders: </a:t>
+            </a:r>
+            <a:r>
+              <a:rPr sz="1080">
                 <a:solidFill>
                   <a:srgbClr val="647491"/>
                 </a:solidFill>
                 <a:latin typeface="Segoe UI"/>
               </a:rPr>
-              <a:t>County Health &amp; Human Services, RTFH.</a:t>
+              <a:t>County HHS, RTFH, DSA.</a:t>
             </a:r>
           </a:p>
         </p:txBody>
@@ -6173,7 +6171,7 @@
               <a:spcAft>
                 <a:spcPts val="200"/>
               </a:spcAft>
-              <a:defRPr sz="1000" b="1">
+              <a:defRPr sz="1200" b="1">
                 <a:solidFill>
                   <a:srgbClr val="3A58E4"/>
                 </a:solidFill>
@@ -6436,157 +6434,182 @@
               </a:defRPr>
             </a:pPr>
             <a:r>
-              <a:t>THE 6 SPECIALIZED DASHBOARD MODULES (TASK 9.1)</a:t>
+              <a:t>7 DASHBOARD MODULES (TASK 9.1)</a:t>
             </a:r>
           </a:p>
           <a:p>
             <a:pPr>
               <a:spcAft>
-                <a:spcPts val="400"/>
+                <a:spcPts val="300"/>
               </a:spcAft>
             </a:pPr>
             <a:r>
-              <a:rPr sz="950" b="1">
+              <a:rPr sz="1150" b="1">
                 <a:solidFill>
                   <a:srgbClr val="3A58E4"/>
                 </a:solidFill>
                 <a:latin typeface="Segoe UI"/>
               </a:rPr>
-              <a:t>• Tab 1: Historical Trends View: </a:t>
-            </a:r>
-            <a:r>
-              <a:rPr sz="880">
+              <a:t>• Tab 1: History: </a:t>
+            </a:r>
+            <a:r>
+              <a:rPr sz="1080">
                 <a:solidFill>
                   <a:srgbClr val="1D1F26"/>
                 </a:solidFill>
                 <a:latin typeface="Segoe UI"/>
               </a:rPr>
-              <a:t>Longitudinal multi-year time series (2017–2025), dynamic multiplier regime markers, macro policy epoch shading, and component toggles (individuals, tents, vehicles).</a:t>
+              <a:t>Multi-year trends with policy epoch overlays.</a:t>
             </a:r>
           </a:p>
           <a:p>
             <a:pPr>
               <a:spcAft>
-                <a:spcPts val="400"/>
+                <a:spcPts val="300"/>
               </a:spcAft>
             </a:pPr>
             <a:r>
-              <a:rPr sz="950" b="1">
+              <a:rPr sz="1150" b="1">
                 <a:solidFill>
                   <a:srgbClr val="3A58E4"/>
                 </a:solidFill>
                 <a:latin typeface="Segoe UI"/>
               </a:rPr>
-              <a:t>• Tab 2: 12-Month Forward Forecast: </a:t>
-            </a:r>
-            <a:r>
-              <a:rPr sz="880">
+              <a:t>• Tab 2: Forecast: </a:t>
+            </a:r>
+            <a:r>
+              <a:rPr sz="1080">
                 <a:solidFill>
                   <a:srgbClr val="1D1F26"/>
                 </a:solidFill>
                 <a:latin typeface="Segoe UI"/>
               </a:rPr>
-              <a:t>Prospective 2026 projections, model selectors (XGBoost champion, Holt-Winters, SARIMA, Prophet), shaded 80%/95% prediction fans, and scenario stress testing (-24% optimistic, +26% pessimistic).</a:t>
+              <a:t>2026 projections, 95% fans, and stress-testing.</a:t>
             </a:r>
           </a:p>
           <a:p>
             <a:pPr>
               <a:spcAft>
-                <a:spcPts val="400"/>
+                <a:spcPts val="300"/>
               </a:spcAft>
             </a:pPr>
             <a:r>
-              <a:rPr sz="950" b="1">
+              <a:rPr sz="1150" b="1">
                 <a:solidFill>
                   <a:srgbClr val="3A58E4"/>
                 </a:solidFill>
                 <a:latin typeface="Segoe UI"/>
               </a:rPr>
-              <a:t>• Tab 3: Hotspot Surveillance Map: </a:t>
-            </a:r>
-            <a:r>
-              <a:rPr sz="880">
+              <a:t>• Tab 3: Hotspots: </a:t>
+            </a:r>
+            <a:r>
+              <a:rPr sz="1080">
                 <a:solidFill>
                   <a:srgbClr val="1D1F26"/>
                 </a:solidFill>
                 <a:latin typeface="Segoe UI"/>
               </a:rPr>
-              <a:t>Folium interactive choropleth, 12 count dates selector, balanced 261 vs 382 footprint toggle, Getis-Ord Gi* classifications (90%, 95%, 99%), and centroid migration vector.</a:t>
+              <a:t>Interactive Gi* maps and centroid migration.</a:t>
             </a:r>
           </a:p>
           <a:p>
             <a:pPr>
               <a:spcAft>
-                <a:spcPts val="400"/>
+                <a:spcPts val="300"/>
               </a:spcAft>
             </a:pPr>
             <a:r>
-              <a:rPr sz="950" b="1">
+              <a:rPr sz="1150" b="1">
                 <a:solidFill>
                   <a:srgbClr val="3A58E4"/>
                 </a:solidFill>
                 <a:latin typeface="Segoe UI"/>
               </a:rPr>
-              <a:t>• Tab 4: Neighborhood Decomposition: </a:t>
-            </a:r>
-            <a:r>
-              <a:rPr sz="880">
+              <a:t>• Tab 4: Regions: </a:t>
+            </a:r>
+            <a:r>
+              <a:rPr sz="1080">
                 <a:solidFill>
                   <a:srgbClr val="1D1F26"/>
                 </a:solidFill>
                 <a:latin typeface="Segoe UI"/>
               </a:rPr>
-              <a:t>4-pane STL decomposition (Trend, Seasonality, Residuals) and Kruskal-Wallis non-parametric significance displays.</a:t>
+              <a:t>STL decomposition and seasonality stats.</a:t>
             </a:r>
           </a:p>
           <a:p>
             <a:pPr>
               <a:spcAft>
-                <a:spcPts val="400"/>
+                <a:spcPts val="300"/>
               </a:spcAft>
             </a:pPr>
             <a:r>
-              <a:rPr sz="950" b="1">
+              <a:rPr sz="1150" b="1">
                 <a:solidFill>
                   <a:srgbClr val="3A58E4"/>
                 </a:solidFill>
                 <a:latin typeface="Segoe UI"/>
               </a:rPr>
-              <a:t>• Tab 5: County Estimation Calculator: </a:t>
-            </a:r>
-            <a:r>
-              <a:rPr sz="880">
+              <a:t>• Tab 5: Calculator: </a:t>
+            </a:r>
+            <a:r>
+              <a:rPr sz="1080">
                 <a:solidFill>
                   <a:srgbClr val="1D1F26"/>
                 </a:solidFill>
                 <a:latin typeface="Segoe UI"/>
               </a:rPr>
-              <a:t>Interactive Policy Regime OLS calculator strictly enforcing The 4 Public Communication Rules with Student's t prediction intervals.</a:t>
+              <a:t>OLS estimator enforcing the 4 Comm Rules.</a:t>
             </a:r>
           </a:p>
           <a:p>
             <a:pPr>
               <a:spcAft>
-                <a:spcPts val="400"/>
+                <a:spcPts val="300"/>
               </a:spcAft>
             </a:pPr>
             <a:r>
-              <a:rPr sz="950" b="1">
+              <a:rPr sz="1150" b="1">
                 <a:solidFill>
                   <a:srgbClr val="3A58E4"/>
                 </a:solidFill>
                 <a:latin typeface="Segoe UI"/>
               </a:rPr>
-              <a:t>• Tab 6: Methodology &amp; Governance: </a:t>
-            </a:r>
-            <a:r>
-              <a:rPr sz="880">
+              <a:t>• Tab 6: Methods: </a:t>
+            </a:r>
+            <a:r>
+              <a:rPr sz="1080">
                 <a:solidFill>
                   <a:srgbClr val="1D1F26"/>
                 </a:solidFill>
                 <a:latin typeface="Segoe UI"/>
               </a:rPr>
-              <a:t>Comprehensive documentation of 4 multiplier schedules, 2022 footprint expansion (+121 blocks), and root causes for historical missing data.</a:t>
+              <a:t>Multiplier transparency and boundary docs.</a:t>
+            </a:r>
+          </a:p>
+          <a:p>
+            <a:pPr>
+              <a:spcAft>
+                <a:spcPts val="300"/>
+              </a:spcAft>
+            </a:pPr>
+            <a:r>
+              <a:rPr sz="1150" b="1">
+                <a:solidFill>
+                  <a:srgbClr val="3A58E4"/>
+                </a:solidFill>
+                <a:latin typeface="Segoe UI"/>
+              </a:rPr>
+              <a:t>• Tab 7: Alerts: </a:t>
+            </a:r>
+            <a:r>
+              <a:rPr sz="1080">
+                <a:solidFill>
+                  <a:srgbClr val="1D1F26"/>
+                </a:solidFill>
+                <a:latin typeface="Segoe UI"/>
+              </a:rPr>
+              <a:t>Control charts (CUSUM) for early-warnings.</a:t>
             </a:r>
           </a:p>
         </p:txBody>
@@ -6680,22 +6703,22 @@
               </a:spcAft>
             </a:pPr>
             <a:r>
-              <a:rPr sz="950" b="1">
+              <a:rPr sz="1150" b="1">
                 <a:solidFill>
                   <a:srgbClr val="3A58E4"/>
                 </a:solidFill>
                 <a:latin typeface="Segoe UI"/>
               </a:rPr>
-              <a:t>• Local Live URL: </a:t>
-            </a:r>
-            <a:r>
-              <a:rPr sz="900">
+              <a:t>• Local URL: </a:t>
+            </a:r>
+            <a:r>
+              <a:rPr sz="1100">
                 <a:solidFill>
                   <a:srgbClr val="1D1F26"/>
                 </a:solidFill>
                 <a:latin typeface="Segoe UI"/>
               </a:rPr>
-              <a:t>http://localhost:8501 (Fast sub-2s response time)</a:t>
+              <a:t>http://localhost:8501 (Fast response)</a:t>
             </a:r>
           </a:p>
           <a:p>
@@ -6705,16 +6728,16 @@
               </a:spcAft>
             </a:pPr>
             <a:r>
-              <a:rPr sz="950" b="1">
+              <a:rPr sz="1150" b="1">
                 <a:solidFill>
                   <a:srgbClr val="3A58E4"/>
                 </a:solidFill>
                 <a:latin typeface="Segoe UI"/>
               </a:rPr>
-              <a:t>• Cloud Production URL: </a:t>
-            </a:r>
-            <a:r>
-              <a:rPr sz="900">
+              <a:t>• Cloud URL: </a:t>
+            </a:r>
+            <a:r>
+              <a:rPr sz="1100">
                 <a:solidFill>
                   <a:srgbClr val="1D1F26"/>
                 </a:solidFill>
@@ -6730,22 +6753,22 @@
               </a:spcAft>
             </a:pPr>
             <a:r>
-              <a:rPr sz="950" b="1">
+              <a:rPr sz="1150" b="1">
                 <a:solidFill>
                   <a:srgbClr val="3A58E4"/>
                 </a:solidFill>
                 <a:latin typeface="Segoe UI"/>
               </a:rPr>
-              <a:t>• Automated Quality: </a:t>
-            </a:r>
-            <a:r>
-              <a:rPr sz="900">
+              <a:t>• Quality Check: </a:t>
+            </a:r>
+            <a:r>
+              <a:rPr sz="1100">
                 <a:solidFill>
                   <a:srgbClr val="1D1F26"/>
                 </a:solidFill>
                 <a:latin typeface="Segoe UI"/>
               </a:rPr>
-              <a:t>10 / 10 pytest unit tests passing with zero regressions.</a:t>
+              <a:t>46/46 unit tests passing.</a:t>
             </a:r>
           </a:p>
           <a:p>
@@ -6755,22 +6778,22 @@
               </a:spcAft>
             </a:pPr>
             <a:r>
-              <a:rPr sz="950" b="1">
+              <a:rPr sz="1150" b="1">
                 <a:solidFill>
                   <a:srgbClr val="3A58E4"/>
                 </a:solidFill>
                 <a:latin typeface="Segoe UI"/>
               </a:rPr>
-              <a:t>• Data Pipeline SLA: </a:t>
-            </a:r>
-            <a:r>
-              <a:rPr sz="900">
+              <a:t>• Performance: </a:t>
+            </a:r>
+            <a:r>
+              <a:rPr sz="1100">
                 <a:solidFill>
                   <a:srgbClr val="1D1F26"/>
                 </a:solidFill>
                 <a:latin typeface="Segoe UI"/>
               </a:rPr>
-              <a:t>@st.cache_data architecture provides microsecond cached lookups across all 6 tabs.</a:t>
+              <a:t>Sub-second caching via @st.cache_data.</a:t>
             </a:r>
           </a:p>
           <a:p>
@@ -6780,22 +6803,22 @@
               </a:spcAft>
             </a:pPr>
             <a:r>
-              <a:rPr sz="950" b="1">
+              <a:rPr sz="1150" b="1">
                 <a:solidFill>
                   <a:srgbClr val="3A58E4"/>
                 </a:solidFill>
                 <a:latin typeface="Segoe UI"/>
               </a:rPr>
-              <a:t>• Target Users: </a:t>
-            </a:r>
-            <a:r>
-              <a:rPr sz="900">
+              <a:t>• Audience: </a:t>
+            </a:r>
+            <a:r>
+              <a:rPr sz="1100">
                 <a:solidFill>
                   <a:srgbClr val="1D1F26"/>
                 </a:solidFill>
                 <a:latin typeface="Segoe UI"/>
               </a:rPr>
-              <a:t>City Council policy analysts, RTFH outreach coordinators, and DSDP operations directors.</a:t>
+              <a:t>City Council, RTFH, DSDP operations.</a:t>
             </a:r>
           </a:p>
         </p:txBody>
@@ -6983,7 +7006,7 @@
               <a:spcAft>
                 <a:spcPts val="200"/>
               </a:spcAft>
-              <a:defRPr sz="1000" b="1">
+              <a:defRPr sz="1200" b="1">
                 <a:solidFill>
                   <a:srgbClr val="3A58E4"/>
                 </a:solidFill>
@@ -7004,7 +7027,7 @@
               </a:defRPr>
             </a:pPr>
             <a:r>
-              <a:t>Executive Synthesis, Data Governance &amp; Partnership Next Steps</a:t>
+              <a:t>Synthesis &amp; Next Steps</a:t>
             </a:r>
           </a:p>
         </p:txBody>
@@ -7289,7 +7312,7 @@
               </a:defRPr>
             </a:pPr>
             <a:r>
-              <a:t>EVIDENCE-BASED RESOURCE ALLOCATION</a:t>
+              <a:t>FUND YEAR-ROUND</a:t>
             </a:r>
           </a:p>
           <a:p>
@@ -7297,7 +7320,7 @@
               <a:spcAft>
                 <a:spcPts val="400"/>
               </a:spcAft>
-              <a:defRPr sz="950" b="1">
+              <a:defRPr sz="1150" b="1">
                 <a:solidFill>
                   <a:srgbClr val="1D1F26"/>
                 </a:solidFill>
@@ -7305,12 +7328,12 @@
               </a:defRPr>
             </a:pPr>
             <a:r>
-              <a:t>Move Beyond Seasonal Budgeting</a:t>
+              <a:t>End Seasonal Budgeting</a:t>
             </a:r>
           </a:p>
           <a:p>
             <a:pPr>
-              <a:defRPr sz="880">
+              <a:defRPr sz="1080">
                 <a:solidFill>
                   <a:srgbClr val="647491"/>
                 </a:solidFill>
@@ -7318,7 +7341,7 @@
               </a:defRPr>
             </a:pPr>
             <a:r>
-              <a:t>Discontinue volatile seasonal budget adjustments. The empirical finding that 8 of 9 series exhibit zero seasonality mandates locking investments into permanent, year-round shelter capacity and focused sanitation on the top 10 persistent South East Village blocks.</a:t>
+              <a:t>Data proves zero seasonality (p=0.995). Lock investments into permanent capacity and target South East Village hotspots.</a:t>
             </a:r>
           </a:p>
         </p:txBody>
@@ -7445,7 +7468,7 @@
               </a:defRPr>
             </a:pPr>
             <a:r>
-              <a:t>REGIONAL ACCOUNTABILITY &amp; SYSTEMS REFORM</a:t>
+              <a:t>ACKNOWLEDGE REALITY</a:t>
             </a:r>
           </a:p>
           <a:p>
@@ -7453,7 +7476,7 @@
               <a:spcAft>
                 <a:spcPts val="400"/>
               </a:spcAft>
-              <a:defRPr sz="950" b="1">
+              <a:defRPr sz="1150" b="1">
                 <a:solidFill>
                   <a:srgbClr val="1D1F26"/>
                 </a:solidFill>
@@ -7461,12 +7484,12 @@
               </a:defRPr>
             </a:pPr>
             <a:r>
-              <a:t>Acknowledge the Regional Displacement Reality</a:t>
+              <a:t>Fix Divergence</a:t>
             </a:r>
           </a:p>
           <a:p>
             <a:pPr>
-              <a:defRPr sz="880">
+              <a:defRPr sz="1080">
                 <a:solidFill>
                   <a:srgbClr val="647491"/>
                 </a:solidFill>
@@ -7474,7 +7497,7 @@
               </a:defRPr>
             </a:pPr>
             <a:r>
-              <a:t>Municipal enforcement in downtown corridors has displaced unsheltered individuals into surrounding municipalities and Caltrans corridors. Solving homelessness requires countywide inter-jurisdictional collaboration and real-time HMIS 2.0 bed allocation.</a:t>
+              <a:t>Downtown drops pair with countywide highs (6,110). Stop localized displacement; demand countywide shelter collaboration.</a:t>
             </a:r>
           </a:p>
         </p:txBody>
@@ -7601,7 +7624,7 @@
               </a:defRPr>
             </a:pPr>
             <a:r>
-              <a:t>CONTINUOUS DATA GOVERNANCE &amp; MACHINE LEARNING</a:t>
+              <a:t>DATA TRANSPARENCY</a:t>
             </a:r>
           </a:p>
           <a:p>
@@ -7609,7 +7632,7 @@
               <a:spcAft>
                 <a:spcPts val="400"/>
               </a:spcAft>
-              <a:defRPr sz="950" b="1">
+              <a:defRPr sz="1150" b="1">
                 <a:solidFill>
                   <a:srgbClr val="1D1F26"/>
                 </a:solidFill>
@@ -7617,12 +7640,12 @@
               </a:defRPr>
             </a:pPr>
             <a:r>
-              <a:t>Annual Retraining &amp; Multi-Source Expansion</a:t>
+              <a:t>Digitize &amp; Retrain</a:t>
             </a:r>
           </a:p>
           <a:p>
             <a:pPr>
-              <a:defRPr sz="880">
+              <a:defRPr sz="1080">
                 <a:solidFill>
                   <a:srgbClr val="647491"/>
                 </a:solidFill>
@@ -7630,7 +7653,7 @@
               </a:defRPr>
             </a:pPr>
             <a:r>
-              <a:t>Retrain the Policy Regime OLS model annually upon RTFH January PIT release using the calibrated Student's t distribution. Transition to Assignment 10 to integrate NOAA weather, 311 service requests, and shelter census signals into an early warning system.</a:t>
+              <a:t>Digitize remaining 78 block maps. Annually retrain the OLS model for accuracy.</a:t>
             </a:r>
           </a:p>
         </p:txBody>
@@ -7818,7 +7841,7 @@
               <a:spcAft>
                 <a:spcPts val="200"/>
               </a:spcAft>
-              <a:defRPr sz="1000" b="1">
+              <a:defRPr sz="1200" b="1">
                 <a:solidFill>
                   <a:srgbClr val="3A58E4"/>
                 </a:solidFill>
@@ -7826,7 +7849,7 @@
               </a:defRPr>
             </a:pPr>
             <a:r>
-              <a:t>EXECUTIVE FRAMING &amp; CORE FINDINGS</a:t>
+              <a:t>EXECUTIVE FRAMING</a:t>
             </a:r>
           </a:p>
           <a:p>
@@ -7839,7 +7862,7 @@
               </a:defRPr>
             </a:pPr>
             <a:r>
-              <a:t>Executive KPI Dashboard: Crisis Peak, Enforcement Contraction &amp; Hotspot Migration</a:t>
+              <a:t>Executive KPIs: Peak &amp; Migration</a:t>
             </a:r>
           </a:p>
         </p:txBody>
@@ -8132,7 +8155,7 @@
               <a:spcAft>
                 <a:spcPts val="300"/>
               </a:spcAft>
-              <a:defRPr sz="950" b="1">
+              <a:defRPr sz="1150" b="1">
                 <a:solidFill>
                   <a:srgbClr val="1D1F26"/>
                 </a:solidFill>
@@ -8145,7 +8168,7 @@
           </a:p>
           <a:p>
             <a:pPr>
-              <a:defRPr sz="850">
+              <a:defRPr sz="1050">
                 <a:solidFill>
                   <a:srgbClr val="647491"/>
                 </a:solidFill>
@@ -8153,7 +8176,7 @@
               </a:defRPr>
             </a:pPr>
             <a:r>
-              <a:t>Highest headline count in downtown history; culmination of 3-year surge.</a:t>
+              <a:t>Highest count on record. Capped a 3-year surge.</a:t>
             </a:r>
           </a:p>
         </p:txBody>
@@ -8288,7 +8311,7 @@
               <a:spcAft>
                 <a:spcPts val="300"/>
               </a:spcAft>
-              <a:defRPr sz="950" b="1">
+              <a:defRPr sz="1150" b="1">
                 <a:solidFill>
                   <a:srgbClr val="1D1F26"/>
                 </a:solidFill>
@@ -8296,12 +8319,12 @@
               </a:defRPr>
             </a:pPr>
             <a:r>
-              <a:t>RECENT COUNT (DEC 2025)</a:t>
+              <a:t>RECENT COUNT (JAN 2025)</a:t>
             </a:r>
           </a:p>
           <a:p>
             <a:pPr>
-              <a:defRPr sz="850">
+              <a:defRPr sz="1050">
                 <a:solidFill>
                   <a:srgbClr val="647491"/>
                 </a:solidFill>
@@ -8309,7 +8332,7 @@
               </a:defRPr>
             </a:pPr>
             <a:r>
-              <a:t>-59.5% reduction from peak post-camping ordinance enforcement.</a:t>
+              <a:t>Down 59% from peak. Dec 2025 hit 985.</a:t>
             </a:r>
           </a:p>
         </p:txBody>
@@ -8436,7 +8459,7 @@
               </a:defRPr>
             </a:pPr>
             <a:r>
-              <a:t>54.8%</a:t>
+              <a:t>54.0%</a:t>
             </a:r>
           </a:p>
           <a:p>
@@ -8444,7 +8467,7 @@
               <a:spcAft>
                 <a:spcPts val="300"/>
               </a:spcAft>
-              <a:defRPr sz="950" b="1">
+              <a:defRPr sz="1150" b="1">
                 <a:solidFill>
                   <a:srgbClr val="1D1F26"/>
                 </a:solidFill>
@@ -8457,7 +8480,7 @@
           </a:p>
           <a:p>
             <a:pPr>
-              <a:defRPr sz="850">
+              <a:defRPr sz="1050">
                 <a:solidFill>
                   <a:srgbClr val="647491"/>
                 </a:solidFill>
@@ -8465,7 +8488,7 @@
               </a:defRPr>
             </a:pPr>
             <a:r>
-              <a:t>Epicenter of downtown homelessness (historical monthly average 552.8).</a:t>
+              <a:t>Core driver of downtown population.</a:t>
             </a:r>
           </a:p>
         </p:txBody>
@@ -8592,7 +8615,7 @@
               </a:defRPr>
             </a:pPr>
             <a:r>
-              <a:t>121m</a:t>
+              <a:t>120 m</a:t>
             </a:r>
           </a:p>
           <a:p>
@@ -8600,7 +8623,7 @@
               <a:spcAft>
                 <a:spcPts val="300"/>
               </a:spcAft>
-              <a:defRPr sz="950" b="1">
+              <a:defRPr sz="1150" b="1">
                 <a:solidFill>
                   <a:srgbClr val="1D1F26"/>
                 </a:solidFill>
@@ -8608,12 +8631,12 @@
               </a:defRPr>
             </a:pPr>
             <a:r>
-              <a:t>SOUTHWARD CENTROID SHIFT</a:t>
+              <a:t>HOTSPOT MIGRATION VECTOR</a:t>
             </a:r>
           </a:p>
           <a:p>
             <a:pPr>
-              <a:defRPr sz="850">
+              <a:defRPr sz="1050">
                 <a:solidFill>
                   <a:srgbClr val="647491"/>
                 </a:solidFill>
@@ -8621,7 +8644,7 @@
               </a:defRPr>
             </a:pPr>
             <a:r>
-              <a:t>Hotspot migration vector toward Commercial St / Imperial Ave transit hub.</a:t>
+              <a:t>Centroid shifted 120m south toward South East Village.</a:t>
             </a:r>
           </a:p>
         </p:txBody>
@@ -8705,7 +8728,7 @@
               </a:defRPr>
             </a:pPr>
             <a:r>
-              <a:t>THE STRATEGIC REALITY: DOWNTOWN CONTRACTION VS. REGIONAL DISPLACEMENT</a:t>
+              <a:t>THE REALITY: DOWNTOWN DROPS VS REGIONAL SHIFTS</a:t>
             </a:r>
           </a:p>
           <a:p>
@@ -8715,22 +8738,22 @@
               </a:spcAft>
             </a:pPr>
             <a:r>
-              <a:rPr sz="1000" b="1">
+              <a:rPr sz="1200" b="1">
                 <a:solidFill>
                   <a:srgbClr val="3A58E4"/>
                 </a:solidFill>
                 <a:latin typeface="Segoe UI"/>
               </a:rPr>
-              <a:t>• Three Trajectory Epochs: </a:t>
-            </a:r>
-            <a:r>
-              <a:rPr sz="950">
+              <a:t>• Three Phases: </a:t>
+            </a:r>
+            <a:r>
+              <a:rPr sz="1150">
                 <a:solidFill>
                   <a:srgbClr val="1D1F26"/>
                 </a:solidFill>
                 <a:latin typeface="Segoe UI"/>
               </a:rPr>
-              <a:t>Downtown transitioned through Baseline Contraction (2017–2020), Crisis Surge (2021–2023), and Enforcement Pullback (2024–2025). Current counts have stabilized near ~850–920.</a:t>
+              <a:t>Pre-COVID drop, massive 2021-2023 surge (peak 2,103), then post-enforcement contraction (851 in Jan 2025).</a:t>
             </a:r>
           </a:p>
           <a:p>
@@ -8740,22 +8763,22 @@
               </a:spcAft>
             </a:pPr>
             <a:r>
-              <a:rPr sz="1000" b="1">
+              <a:rPr sz="1200" b="1">
                 <a:solidFill>
                   <a:srgbClr val="3A58E4"/>
                 </a:solidFill>
                 <a:latin typeface="Segoe UI"/>
               </a:rPr>
-              <a:t>• Debunking Seasonality: </a:t>
-            </a:r>
-            <a:r>
-              <a:rPr sz="950">
+              <a:t>• No Seasonality: </a:t>
+            </a:r>
+            <a:r>
+              <a:rPr sz="1150">
                 <a:solidFill>
                   <a:srgbClr val="1D1F26"/>
                 </a:solidFill>
                 <a:latin typeface="Segoe UI"/>
               </a:rPr>
-              <a:t>Non-parametric tests prove 8 of 9 downtown series have NO statistically significant seasonality (H=3.00, p=0.99). Resource budgeting based on 'winter surges' or 'summer peaks' is empirically flawed.</a:t>
+              <a:t>Weather doesn't drive numbers (p=0.995). Seasonal budgets are a mismatch for year-round needs.</a:t>
             </a:r>
           </a:p>
           <a:p>
@@ -8765,22 +8788,22 @@
               </a:spcAft>
             </a:pPr>
             <a:r>
-              <a:rPr sz="1000" b="1">
+              <a:rPr sz="1200" b="1">
                 <a:solidFill>
                   <a:srgbClr val="3A58E4"/>
                 </a:solidFill>
                 <a:latin typeface="Segoe UI"/>
               </a:rPr>
-              <a:t>• The Boundary Wedge: </a:t>
-            </a:r>
-            <a:r>
-              <a:rPr sz="950">
+              <a:t>• Map Changes: </a:t>
+            </a:r>
+            <a:r>
+              <a:rPr sz="1150">
                 <a:solidFill>
                   <a:srgbClr val="1D1F26"/>
                 </a:solidFill>
                 <a:latin typeface="Segoe UI"/>
               </a:rPr>
-              <a:t>In 2022, DSDP added 121 peripheral blocks, accounting for 4% to 33% of reported count increases. Longitudinal comparisons require balanced 261-block spatial controls.</a:t>
+              <a:t>121 blocks added in 2022. Correcting for this shows a real, but smaller, +71% surge in the core.</a:t>
             </a:r>
           </a:p>
           <a:p>
@@ -8790,22 +8813,22 @@
               </a:spcAft>
             </a:pPr>
             <a:r>
-              <a:rPr sz="1000" b="1">
+              <a:rPr sz="1200" b="1">
                 <a:solidFill>
                   <a:srgbClr val="3A58E4"/>
                 </a:solidFill>
                 <a:latin typeface="Segoe UI"/>
               </a:rPr>
-              <a:t>• Regional Spillover Paradox: </a:t>
-            </a:r>
-            <a:r>
-              <a:rPr sz="950">
+              <a:t>• Regional Shift: </a:t>
+            </a:r>
+            <a:r>
+              <a:rPr sz="1150">
                 <a:solidFill>
                   <a:srgbClr val="1D1F26"/>
                 </a:solidFill>
                 <a:latin typeface="Segoe UI"/>
               </a:rPr>
-              <a:t>Downtown's share of county unsheltered population collapsed from 37.5% (2023) to 14.9% (2025), yet countywide unsheltered numbers reached an all-time record of 6,110 in 2024. Unsheltered homelessness was pushed into riverbeds and neighboring cities, not resolved.</a:t>
+              <a:t>Downtown share fell to 15%, while countywide hit a record 6,110. The crisis moved, it didn't end.</a:t>
             </a:r>
           </a:p>
         </p:txBody>
@@ -8993,7 +9016,7 @@
               <a:spcAft>
                 <a:spcPts val="200"/>
               </a:spcAft>
-              <a:defRPr sz="1000" b="1">
+              <a:defRPr sz="1200" b="1">
                 <a:solidFill>
                   <a:srgbClr val="3A58E4"/>
                 </a:solidFill>
@@ -9014,7 +9037,7 @@
               </a:defRPr>
             </a:pPr>
             <a:r>
-              <a:t>The 9-Year Trajectory: Three Distinct Macro Policy Epochs (2017–2025)</a:t>
+              <a:t>9-Year Trajectory: Three Policy Epochs</a:t>
             </a:r>
           </a:p>
         </p:txBody>
@@ -9224,7 +9247,7 @@
       </p:sp>
       <p:pic>
         <p:nvPicPr>
-          <p:cNvPr id="11" name="Picture 10" descr="chart1_clean_hd.png"/>
+          <p:cNvPr id="11" name="Picture 10" descr="task93_trajectory_9year.png"/>
           <p:cNvPicPr>
             <a:picLocks noChangeAspect="1"/>
           </p:cNvPicPr>
@@ -9238,8 +9261,8 @@
         </p:blipFill>
         <p:spPr>
           <a:xfrm>
-            <a:off x="822960" y="2359882"/>
-            <a:ext cx="6400800" cy="2778314"/>
+            <a:off x="822960" y="2148840"/>
+            <a:ext cx="6400800" cy="3200400"/>
           </a:xfrm>
           <a:prstGeom prst="rect">
             <a:avLst/>
@@ -9325,7 +9348,7 @@
               </a:defRPr>
             </a:pPr>
             <a:r>
-              <a:t>Epoch 1: Baseline Contraction (2017–2020)</a:t>
+              <a:t>Epoch 1: Contraction (2017–2020)</a:t>
             </a:r>
           </a:p>
           <a:p>
@@ -9333,7 +9356,7 @@
               <a:spcAft>
                 <a:spcPts val="200"/>
               </a:spcAft>
-              <a:defRPr sz="950" b="1">
+              <a:defRPr sz="1150" b="1">
                 <a:solidFill>
                   <a:srgbClr val="1D1F26"/>
                 </a:solidFill>
@@ -9341,12 +9364,12 @@
               </a:defRPr>
             </a:pPr>
             <a:r>
-              <a:t>Low of 689 in April 2020 (-19.7% YoY)</a:t>
+              <a:t>Low of 529 in Mar 2020 (−38%)</a:t>
             </a:r>
           </a:p>
           <a:p>
             <a:pPr>
-              <a:defRPr sz="850">
+              <a:defRPr sz="1050">
                 <a:solidFill>
                   <a:srgbClr val="647491"/>
                 </a:solidFill>
@@ -9354,7 +9377,7 @@
               </a:defRPr>
             </a:pPr>
             <a:r>
-              <a:t>Characterized by shelter expansions and COVID-19 emergency response (Convention Center de-densification Operation Shelter to Home).</a:t>
+              <a:t>Pre-COVID drop. Baseline interventions worked.</a:t>
             </a:r>
           </a:p>
         </p:txBody>
@@ -9438,7 +9461,7 @@
               </a:defRPr>
             </a:pPr>
             <a:r>
-              <a:t>Epoch 2: The Crisis Surge (2021–2023)</a:t>
+              <a:t>Epoch 2: Crisis Surge (2021–2023)</a:t>
             </a:r>
           </a:p>
           <a:p>
@@ -9446,7 +9469,7 @@
               <a:spcAft>
                 <a:spcPts val="200"/>
               </a:spcAft>
-              <a:defRPr sz="950" b="1">
+              <a:defRPr sz="1150" b="1">
                 <a:solidFill>
                   <a:srgbClr val="1D1F26"/>
                 </a:solidFill>
@@ -9454,12 +9477,12 @@
               </a:defRPr>
             </a:pPr>
             <a:r>
-              <a:t>May 2023 Peak of 2,103 (+144% from 2020 low)</a:t>
+              <a:t>May 2023 Peak of 2,103 (+297%)</a:t>
             </a:r>
           </a:p>
           <a:p>
             <a:pPr>
-              <a:defRPr sz="850">
+              <a:defRPr sz="1050">
                 <a:solidFill>
                   <a:srgbClr val="647491"/>
                 </a:solidFill>
@@ -9467,7 +9490,7 @@
               </a:defRPr>
             </a:pPr>
             <a:r>
-              <a:t>Convention Center shelter closure, eviction moratoria lapses, inflation, and fentanyl expansion drove unprecedented street encampments.</a:t>
+              <a:t>Driven by shelter de-densification and housing vulnerability.</a:t>
             </a:r>
           </a:p>
         </p:txBody>
@@ -9551,7 +9574,7 @@
               </a:defRPr>
             </a:pPr>
             <a:r>
-              <a:t>Epoch 3: Enforcement Pullback (2024–2025)</a:t>
+              <a:t>Epoch 3: Enforcement (2024–2025)</a:t>
             </a:r>
           </a:p>
           <a:p>
@@ -9559,7 +9582,7 @@
               <a:spcAft>
                 <a:spcPts val="200"/>
               </a:spcAft>
-              <a:defRPr sz="950" b="1">
+              <a:defRPr sz="1150" b="1">
                 <a:solidFill>
                   <a:srgbClr val="1D1F26"/>
                 </a:solidFill>
@@ -9567,12 +9590,12 @@
               </a:defRPr>
             </a:pPr>
             <a:r>
-              <a:t>Collapse to 851 (-59.5% from peak)</a:t>
+              <a:t>Jan 2025 Count of 851 (−59%)</a:t>
             </a:r>
           </a:p>
           <a:p>
             <a:pPr>
-              <a:defRPr sz="850">
+              <a:defRPr sz="1050">
                 <a:solidFill>
                   <a:srgbClr val="647491"/>
                 </a:solidFill>
@@ -9580,7 +9603,7 @@
               </a:defRPr>
             </a:pPr>
             <a:r>
-              <a:t>City of San Diego Unsafe Camping Ordinance (July 2023) and Safe Sleeping Sites (O Lot, 20th &amp; B) cleared key commercial corridors.</a:t>
+              <a:t>Sharp drop post-Camping Ordinance. Counts stabilized ~860-880.</a:t>
             </a:r>
           </a:p>
         </p:txBody>
@@ -9768,7 +9791,7 @@
               <a:spcAft>
                 <a:spcPts val="200"/>
               </a:spcAft>
-              <a:defRPr sz="1000" b="1">
+              <a:defRPr sz="1200" b="1">
                 <a:solidFill>
                   <a:srgbClr val="3A58E4"/>
                 </a:solidFill>
@@ -9789,7 +9812,7 @@
               </a:defRPr>
             </a:pPr>
             <a:r>
-              <a:t>Debunking the Seasonality Myth: Homelessness Is Not Driven by Weather</a:t>
+              <a:t>Seasonality Myth: Weather Doesn't Drive Homelessness</a:t>
             </a:r>
           </a:p>
         </p:txBody>
@@ -9961,7 +9984,7 @@
         <p:spPr>
           <a:xfrm>
             <a:off x="731520" y="1463040"/>
-            <a:ext cx="5943600" cy="4572000"/>
+            <a:ext cx="6217920" cy="4572000"/>
           </a:xfrm>
           <a:prstGeom prst="roundRect">
             <a:avLst/>
@@ -10006,7 +10029,7 @@
         <p:spPr>
           <a:xfrm>
             <a:off x="914400" y="1600200"/>
-            <a:ext cx="5577840" cy="548640"/>
+            <a:ext cx="5852160" cy="457200"/>
           </a:xfrm>
           <a:prstGeom prst="rect">
             <a:avLst/>
@@ -10028,7 +10051,7 @@
               </a:defRPr>
             </a:pPr>
             <a:r>
-              <a:t>Kruskal-Wallis Non-Parametric Seasonality Tests (12 Months, df=11)</a:t>
+              <a:t>Kruskal-Wallis Tests (df=11)</a:t>
             </a:r>
           </a:p>
         </p:txBody>
@@ -10042,8 +10065,8 @@
           <p:nvPr/>
         </p:nvGraphicFramePr>
         <p:xfrm>
-          <a:off x="914400" y="2194560"/>
-          <a:ext cx="5577840" cy="3566160"/>
+          <a:off x="914400" y="2148840"/>
+          <a:ext cx="5852160" cy="3611880"/>
         </p:xfrm>
         <a:graphic>
           <a:graphicData uri="http://schemas.openxmlformats.org/drawingml/2006/table">
@@ -10053,18 +10076,19 @@
               </a:tblPr>
               <a:tblGrid>
                 <a:gridCol w="2286000"/>
-                <a:gridCol w="914400"/>
-                <a:gridCol w="914400"/>
+                <a:gridCol w="822960"/>
+                <a:gridCol w="640080"/>
+                <a:gridCol w="640080"/>
                 <a:gridCol w="1463040"/>
               </a:tblGrid>
-              <a:tr h="356616">
+              <a:tr h="361188">
                 <a:tc>
                   <a:txBody>
                     <a:bodyPr wrap="square" lIns="54864" rIns="54864" tIns="54864" bIns="54864"/>
                     <a:lstStyle/>
                     <a:p>
                       <a:pPr algn="ctr">
-                        <a:defRPr sz="950" b="1">
+                        <a:defRPr sz="1100" b="1">
                           <a:solidFill>
                             <a:srgbClr val="FFFFFF"/>
                           </a:solidFill>
@@ -10088,7 +10112,7 @@
                     <a:lstStyle/>
                     <a:p>
                       <a:pPr algn="ctr">
-                        <a:defRPr sz="950" b="1">
+                        <a:defRPr sz="1100" b="1">
                           <a:solidFill>
                             <a:srgbClr val="FFFFFF"/>
                           </a:solidFill>
@@ -10096,7 +10120,7 @@
                         </a:defRPr>
                       </a:pPr>
                       <a:r>
-                        <a:t>H-Stat</a:t>
+                        <a:t>Kruskal-Wallis H</a:t>
                       </a:r>
                     </a:p>
                   </a:txBody>
@@ -10112,7 +10136,7 @@
                     <a:lstStyle/>
                     <a:p>
                       <a:pPr algn="ctr">
-                        <a:defRPr sz="950" b="1">
+                        <a:defRPr sz="1100" b="1">
                           <a:solidFill>
                             <a:srgbClr val="FFFFFF"/>
                           </a:solidFill>
@@ -10120,7 +10144,7 @@
                         </a:defRPr>
                       </a:pPr>
                       <a:r>
-                        <a:t>p-value</a:t>
+                        <a:t>KW p</a:t>
                       </a:r>
                     </a:p>
                   </a:txBody>
@@ -10136,7 +10160,7 @@
                     <a:lstStyle/>
                     <a:p>
                       <a:pPr algn="ctr">
-                        <a:defRPr sz="950" b="1">
+                        <a:defRPr sz="1100" b="1">
                           <a:solidFill>
                             <a:srgbClr val="FFFFFF"/>
                           </a:solidFill>
@@ -10144,7 +10168,31 @@
                         </a:defRPr>
                       </a:pPr>
                       <a:r>
-                        <a:t>Seasonality Verdict</a:t>
+                        <a:t>ANOVA p</a:t>
+                      </a:r>
+                    </a:p>
+                  </a:txBody>
+                  <a:tcPr>
+                    <a:solidFill>
+                      <a:srgbClr val="293E9C"/>
+                    </a:solidFill>
+                  </a:tcPr>
+                </a:tc>
+                <a:tc>
+                  <a:txBody>
+                    <a:bodyPr wrap="square" lIns="54864" rIns="54864" tIns="54864" bIns="54864"/>
+                    <a:lstStyle/>
+                    <a:p>
+                      <a:pPr algn="ctr">
+                        <a:defRPr sz="1100" b="1">
+                          <a:solidFill>
+                            <a:srgbClr val="FFFFFF"/>
+                          </a:solidFill>
+                          <a:latin typeface="Segoe UI"/>
+                        </a:defRPr>
+                      </a:pPr>
+                      <a:r>
+                        <a:t>Verdict</a:t>
                       </a:r>
                     </a:p>
                   </a:txBody>
@@ -10155,14 +10203,14 @@
                   </a:tcPr>
                 </a:tc>
               </a:tr>
-              <a:tr h="356616">
+              <a:tr h="361188">
                 <a:tc>
                   <a:txBody>
                     <a:bodyPr wrap="square" lIns="54864" rIns="54864" tIns="54864" bIns="54864"/>
                     <a:lstStyle/>
                     <a:p>
                       <a:pPr algn="l">
-                        <a:defRPr sz="850" b="1">
+                        <a:defRPr sz="1050" b="1">
                           <a:solidFill>
                             <a:srgbClr val="1D1F26"/>
                           </a:solidFill>
@@ -10170,7 +10218,7 @@
                         </a:defRPr>
                       </a:pPr>
                       <a:r>
-                        <a:t>Overall - Reported Footprint</a:t>
+                        <a:t>Overall — Reported Footprint</a:t>
                       </a:r>
                     </a:p>
                   </a:txBody>
@@ -10186,7 +10234,7 @@
                     <a:lstStyle/>
                     <a:p>
                       <a:pPr algn="ctr">
-                        <a:defRPr sz="850">
+                        <a:defRPr sz="1050">
                           <a:solidFill>
                             <a:srgbClr val="1D1F26"/>
                           </a:solidFill>
@@ -10194,7 +10242,7 @@
                         </a:defRPr>
                       </a:pPr>
                       <a:r>
-                        <a:t>3.00</a:t>
+                        <a:t>2.66</a:t>
                       </a:r>
                     </a:p>
                   </a:txBody>
@@ -10210,7 +10258,7 @@
                     <a:lstStyle/>
                     <a:p>
                       <a:pPr algn="ctr">
-                        <a:defRPr sz="850">
+                        <a:defRPr sz="1050">
                           <a:solidFill>
                             <a:srgbClr val="1D1F26"/>
                           </a:solidFill>
@@ -10218,7 +10266,7 @@
                         </a:defRPr>
                       </a:pPr>
                       <a:r>
-                        <a:t>0.990</a:t>
+                        <a:t>0.995</a:t>
                       </a:r>
                     </a:p>
                   </a:txBody>
@@ -10234,7 +10282,7 @@
                     <a:lstStyle/>
                     <a:p>
                       <a:pPr algn="ctr">
-                        <a:defRPr sz="850">
+                        <a:defRPr sz="1050">
                           <a:solidFill>
                             <a:srgbClr val="1D1F26"/>
                           </a:solidFill>
@@ -10242,7 +10290,31 @@
                         </a:defRPr>
                       </a:pPr>
                       <a:r>
-                        <a:t>Zero Seasonality (p &gt; 0.05)</a:t>
+                        <a:t>0.998</a:t>
+                      </a:r>
+                    </a:p>
+                  </a:txBody>
+                  <a:tcPr>
+                    <a:solidFill>
+                      <a:srgbClr val="FFFFFF"/>
+                    </a:solidFill>
+                  </a:tcPr>
+                </a:tc>
+                <a:tc>
+                  <a:txBody>
+                    <a:bodyPr wrap="square" lIns="54864" rIns="54864" tIns="54864" bIns="54864"/>
+                    <a:lstStyle/>
+                    <a:p>
+                      <a:pPr algn="ctr">
+                        <a:defRPr sz="1050">
+                          <a:solidFill>
+                            <a:srgbClr val="1D1F26"/>
+                          </a:solidFill>
+                          <a:latin typeface="Segoe UI"/>
+                        </a:defRPr>
+                      </a:pPr>
+                      <a:r>
+                        <a:t>No Seasonality</a:t>
                       </a:r>
                     </a:p>
                   </a:txBody>
@@ -10253,14 +10325,14 @@
                   </a:tcPr>
                 </a:tc>
               </a:tr>
-              <a:tr h="356616">
+              <a:tr h="361188">
                 <a:tc>
                   <a:txBody>
                     <a:bodyPr wrap="square" lIns="54864" rIns="54864" tIns="54864" bIns="54864"/>
                     <a:lstStyle/>
                     <a:p>
                       <a:pPr algn="l">
-                        <a:defRPr sz="850" b="1">
+                        <a:defRPr sz="1050" b="1">
                           <a:solidFill>
                             <a:srgbClr val="1D1F26"/>
                           </a:solidFill>
@@ -10268,7 +10340,7 @@
                         </a:defRPr>
                       </a:pPr>
                       <a:r>
-                        <a:t>Overall - Fixed Core Six</a:t>
+                        <a:t>Overall — Fixed Core Six</a:t>
                       </a:r>
                     </a:p>
                   </a:txBody>
@@ -10284,7 +10356,7 @@
                     <a:lstStyle/>
                     <a:p>
                       <a:pPr algn="ctr">
-                        <a:defRPr sz="850">
+                        <a:defRPr sz="1050">
                           <a:solidFill>
                             <a:srgbClr val="1D1F26"/>
                           </a:solidFill>
@@ -10292,7 +10364,7 @@
                         </a:defRPr>
                       </a:pPr>
                       <a:r>
-                        <a:t>3.58</a:t>
+                        <a:t>9.00</a:t>
                       </a:r>
                     </a:p>
                   </a:txBody>
@@ -10308,7 +10380,7 @@
                     <a:lstStyle/>
                     <a:p>
                       <a:pPr algn="ctr">
-                        <a:defRPr sz="850">
+                        <a:defRPr sz="1050">
                           <a:solidFill>
                             <a:srgbClr val="1D1F26"/>
                           </a:solidFill>
@@ -10316,7 +10388,7 @@
                         </a:defRPr>
                       </a:pPr>
                       <a:r>
-                        <a:t>0.980</a:t>
+                        <a:t>0.622</a:t>
                       </a:r>
                     </a:p>
                   </a:txBody>
@@ -10332,7 +10404,7 @@
                     <a:lstStyle/>
                     <a:p>
                       <a:pPr algn="ctr">
-                        <a:defRPr sz="850">
+                        <a:defRPr sz="1050">
                           <a:solidFill>
                             <a:srgbClr val="1D1F26"/>
                           </a:solidFill>
@@ -10340,7 +10412,31 @@
                         </a:defRPr>
                       </a:pPr>
                       <a:r>
-                        <a:t>Zero Seasonality (p &gt; 0.05)</a:t>
+                        <a:t>0.670</a:t>
+                      </a:r>
+                    </a:p>
+                  </a:txBody>
+                  <a:tcPr>
+                    <a:solidFill>
+                      <a:srgbClr val="F5F7FB"/>
+                    </a:solidFill>
+                  </a:tcPr>
+                </a:tc>
+                <a:tc>
+                  <a:txBody>
+                    <a:bodyPr wrap="square" lIns="54864" rIns="54864" tIns="54864" bIns="54864"/>
+                    <a:lstStyle/>
+                    <a:p>
+                      <a:pPr algn="ctr">
+                        <a:defRPr sz="1050">
+                          <a:solidFill>
+                            <a:srgbClr val="1D1F26"/>
+                          </a:solidFill>
+                          <a:latin typeface="Segoe UI"/>
+                        </a:defRPr>
+                      </a:pPr>
+                      <a:r>
+                        <a:t>No Seasonality</a:t>
                       </a:r>
                     </a:p>
                   </a:txBody>
@@ -10351,14 +10447,14 @@
                   </a:tcPr>
                 </a:tc>
               </a:tr>
-              <a:tr h="356616">
+              <a:tr h="361188">
                 <a:tc>
                   <a:txBody>
                     <a:bodyPr wrap="square" lIns="54864" rIns="54864" tIns="54864" bIns="54864"/>
                     <a:lstStyle/>
                     <a:p>
                       <a:pPr algn="l">
-                        <a:defRPr sz="850" b="1">
+                        <a:defRPr sz="1050" b="1">
                           <a:solidFill>
                             <a:srgbClr val="1D1F26"/>
                           </a:solidFill>
@@ -10382,7 +10478,7 @@
                     <a:lstStyle/>
                     <a:p>
                       <a:pPr algn="ctr">
-                        <a:defRPr sz="850">
+                        <a:defRPr sz="1050">
                           <a:solidFill>
                             <a:srgbClr val="1D1F26"/>
                           </a:solidFill>
@@ -10390,7 +10486,7 @@
                         </a:defRPr>
                       </a:pPr>
                       <a:r>
-                        <a:t>4.12</a:t>
+                        <a:t>14.16</a:t>
                       </a:r>
                     </a:p>
                   </a:txBody>
@@ -10406,7 +10502,7 @@
                     <a:lstStyle/>
                     <a:p>
                       <a:pPr algn="ctr">
-                        <a:defRPr sz="850">
+                        <a:defRPr sz="1050">
                           <a:solidFill>
                             <a:srgbClr val="1D1F26"/>
                           </a:solidFill>
@@ -10414,7 +10510,7 @@
                         </a:defRPr>
                       </a:pPr>
                       <a:r>
-                        <a:t>0.966</a:t>
+                        <a:t>0.224</a:t>
                       </a:r>
                     </a:p>
                   </a:txBody>
@@ -10430,7 +10526,7 @@
                     <a:lstStyle/>
                     <a:p>
                       <a:pPr algn="ctr">
-                        <a:defRPr sz="850">
+                        <a:defRPr sz="1050">
                           <a:solidFill>
                             <a:srgbClr val="1D1F26"/>
                           </a:solidFill>
@@ -10438,7 +10534,31 @@
                         </a:defRPr>
                       </a:pPr>
                       <a:r>
-                        <a:t>Zero Seasonality (p &gt; 0.05)</a:t>
+                        <a:t>0.219</a:t>
+                      </a:r>
+                    </a:p>
+                  </a:txBody>
+                  <a:tcPr>
+                    <a:solidFill>
+                      <a:srgbClr val="FFFFFF"/>
+                    </a:solidFill>
+                  </a:tcPr>
+                </a:tc>
+                <a:tc>
+                  <a:txBody>
+                    <a:bodyPr wrap="square" lIns="54864" rIns="54864" tIns="54864" bIns="54864"/>
+                    <a:lstStyle/>
+                    <a:p>
+                      <a:pPr algn="ctr">
+                        <a:defRPr sz="1050">
+                          <a:solidFill>
+                            <a:srgbClr val="1D1F26"/>
+                          </a:solidFill>
+                          <a:latin typeface="Segoe UI"/>
+                        </a:defRPr>
+                      </a:pPr>
+                      <a:r>
+                        <a:t>No Seasonality</a:t>
                       </a:r>
                     </a:p>
                   </a:txBody>
@@ -10449,14 +10569,14 @@
                   </a:tcPr>
                 </a:tc>
               </a:tr>
-              <a:tr h="356616">
+              <a:tr h="361188">
                 <a:tc>
                   <a:txBody>
                     <a:bodyPr wrap="square" lIns="54864" rIns="54864" tIns="54864" bIns="54864"/>
                     <a:lstStyle/>
                     <a:p>
                       <a:pPr algn="l">
-                        <a:defRPr sz="850" b="1">
+                        <a:defRPr sz="1050" b="1">
                           <a:solidFill>
                             <a:srgbClr val="1D1F26"/>
                           </a:solidFill>
@@ -10480,7 +10600,7 @@
                     <a:lstStyle/>
                     <a:p>
                       <a:pPr algn="ctr">
-                        <a:defRPr sz="850">
+                        <a:defRPr sz="1050">
                           <a:solidFill>
                             <a:srgbClr val="1D1F26"/>
                           </a:solidFill>
@@ -10488,7 +10608,7 @@
                         </a:defRPr>
                       </a:pPr>
                       <a:r>
-                        <a:t>5.21</a:t>
+                        <a:t>4.86</a:t>
                       </a:r>
                     </a:p>
                   </a:txBody>
@@ -10504,7 +10624,7 @@
                     <a:lstStyle/>
                     <a:p>
                       <a:pPr algn="ctr">
-                        <a:defRPr sz="850">
+                        <a:defRPr sz="1050">
                           <a:solidFill>
                             <a:srgbClr val="1D1F26"/>
                           </a:solidFill>
@@ -10512,7 +10632,7 @@
                         </a:defRPr>
                       </a:pPr>
                       <a:r>
-                        <a:t>0.921</a:t>
+                        <a:t>0.938</a:t>
                       </a:r>
                     </a:p>
                   </a:txBody>
@@ -10528,7 +10648,7 @@
                     <a:lstStyle/>
                     <a:p>
                       <a:pPr algn="ctr">
-                        <a:defRPr sz="850">
+                        <a:defRPr sz="1050">
                           <a:solidFill>
                             <a:srgbClr val="1D1F26"/>
                           </a:solidFill>
@@ -10536,7 +10656,31 @@
                         </a:defRPr>
                       </a:pPr>
                       <a:r>
-                        <a:t>Zero Seasonality (p &gt; 0.05)</a:t>
+                        <a:t>0.913</a:t>
+                      </a:r>
+                    </a:p>
+                  </a:txBody>
+                  <a:tcPr>
+                    <a:solidFill>
+                      <a:srgbClr val="F5F7FB"/>
+                    </a:solidFill>
+                  </a:tcPr>
+                </a:tc>
+                <a:tc>
+                  <a:txBody>
+                    <a:bodyPr wrap="square" lIns="54864" rIns="54864" tIns="54864" bIns="54864"/>
+                    <a:lstStyle/>
+                    <a:p>
+                      <a:pPr algn="ctr">
+                        <a:defRPr sz="1050">
+                          <a:solidFill>
+                            <a:srgbClr val="1D1F26"/>
+                          </a:solidFill>
+                          <a:latin typeface="Segoe UI"/>
+                        </a:defRPr>
+                      </a:pPr>
+                      <a:r>
+                        <a:t>No Seasonality</a:t>
                       </a:r>
                     </a:p>
                   </a:txBody>
@@ -10547,14 +10691,14 @@
                   </a:tcPr>
                 </a:tc>
               </a:tr>
-              <a:tr h="356616">
+              <a:tr h="361188">
                 <a:tc>
                   <a:txBody>
                     <a:bodyPr wrap="square" lIns="54864" rIns="54864" tIns="54864" bIns="54864"/>
                     <a:lstStyle/>
                     <a:p>
                       <a:pPr algn="l">
-                        <a:defRPr sz="850" b="1">
+                        <a:defRPr sz="1050" b="1">
                           <a:solidFill>
                             <a:srgbClr val="1D1F26"/>
                           </a:solidFill>
@@ -10578,7 +10722,7 @@
                     <a:lstStyle/>
                     <a:p>
                       <a:pPr algn="ctr">
-                        <a:defRPr sz="850">
+                        <a:defRPr sz="1050">
                           <a:solidFill>
                             <a:srgbClr val="1D1F26"/>
                           </a:solidFill>
@@ -10586,7 +10730,7 @@
                         </a:defRPr>
                       </a:pPr>
                       <a:r>
-                        <a:t>3.84</a:t>
+                        <a:t>14.57</a:t>
                       </a:r>
                     </a:p>
                   </a:txBody>
@@ -10602,7 +10746,7 @@
                     <a:lstStyle/>
                     <a:p>
                       <a:pPr algn="ctr">
-                        <a:defRPr sz="850">
+                        <a:defRPr sz="1050">
                           <a:solidFill>
                             <a:srgbClr val="1D1F26"/>
                           </a:solidFill>
@@ -10610,7 +10754,7 @@
                         </a:defRPr>
                       </a:pPr>
                       <a:r>
-                        <a:t>0.974</a:t>
+                        <a:t>0.203</a:t>
                       </a:r>
                     </a:p>
                   </a:txBody>
@@ -10626,7 +10770,7 @@
                     <a:lstStyle/>
                     <a:p>
                       <a:pPr algn="ctr">
-                        <a:defRPr sz="850">
+                        <a:defRPr sz="1050">
                           <a:solidFill>
                             <a:srgbClr val="1D1F26"/>
                           </a:solidFill>
@@ -10634,7 +10778,31 @@
                         </a:defRPr>
                       </a:pPr>
                       <a:r>
-                        <a:t>Zero Seasonality (p &gt; 0.05)</a:t>
+                        <a:t>0.087</a:t>
+                      </a:r>
+                    </a:p>
+                  </a:txBody>
+                  <a:tcPr>
+                    <a:solidFill>
+                      <a:srgbClr val="FFFFFF"/>
+                    </a:solidFill>
+                  </a:tcPr>
+                </a:tc>
+                <a:tc>
+                  <a:txBody>
+                    <a:bodyPr wrap="square" lIns="54864" rIns="54864" tIns="54864" bIns="54864"/>
+                    <a:lstStyle/>
+                    <a:p>
+                      <a:pPr algn="ctr">
+                        <a:defRPr sz="1050">
+                          <a:solidFill>
+                            <a:srgbClr val="1D1F26"/>
+                          </a:solidFill>
+                          <a:latin typeface="Segoe UI"/>
+                        </a:defRPr>
+                      </a:pPr>
+                      <a:r>
+                        <a:t>No Seasonality</a:t>
                       </a:r>
                     </a:p>
                   </a:txBody>
@@ -10645,14 +10813,14 @@
                   </a:tcPr>
                 </a:tc>
               </a:tr>
-              <a:tr h="356616">
+              <a:tr h="361188">
                 <a:tc>
                   <a:txBody>
                     <a:bodyPr wrap="square" lIns="54864" rIns="54864" tIns="54864" bIns="54864"/>
                     <a:lstStyle/>
                     <a:p>
                       <a:pPr algn="l">
-                        <a:defRPr sz="850" b="1">
+                        <a:defRPr sz="1050" b="1">
                           <a:solidFill>
                             <a:srgbClr val="1D1F26"/>
                           </a:solidFill>
@@ -10676,7 +10844,7 @@
                     <a:lstStyle/>
                     <a:p>
                       <a:pPr algn="ctr">
-                        <a:defRPr sz="850">
+                        <a:defRPr sz="1050">
                           <a:solidFill>
                             <a:srgbClr val="1D1F26"/>
                           </a:solidFill>
@@ -10684,7 +10852,7 @@
                         </a:defRPr>
                       </a:pPr>
                       <a:r>
-                        <a:t>4.60</a:t>
+                        <a:t>8.76</a:t>
                       </a:r>
                     </a:p>
                   </a:txBody>
@@ -10700,7 +10868,7 @@
                     <a:lstStyle/>
                     <a:p>
                       <a:pPr algn="ctr">
-                        <a:defRPr sz="850">
+                        <a:defRPr sz="1050">
                           <a:solidFill>
                             <a:srgbClr val="1D1F26"/>
                           </a:solidFill>
@@ -10708,7 +10876,7 @@
                         </a:defRPr>
                       </a:pPr>
                       <a:r>
-                        <a:t>0.949</a:t>
+                        <a:t>0.644</a:t>
                       </a:r>
                     </a:p>
                   </a:txBody>
@@ -10724,7 +10892,7 @@
                     <a:lstStyle/>
                     <a:p>
                       <a:pPr algn="ctr">
-                        <a:defRPr sz="850">
+                        <a:defRPr sz="1050">
                           <a:solidFill>
                             <a:srgbClr val="1D1F26"/>
                           </a:solidFill>
@@ -10732,7 +10900,31 @@
                         </a:defRPr>
                       </a:pPr>
                       <a:r>
-                        <a:t>Zero Seasonality (p &gt; 0.05)</a:t>
+                        <a:t>0.473</a:t>
+                      </a:r>
+                    </a:p>
+                  </a:txBody>
+                  <a:tcPr>
+                    <a:solidFill>
+                      <a:srgbClr val="F5F7FB"/>
+                    </a:solidFill>
+                  </a:tcPr>
+                </a:tc>
+                <a:tc>
+                  <a:txBody>
+                    <a:bodyPr wrap="square" lIns="54864" rIns="54864" tIns="54864" bIns="54864"/>
+                    <a:lstStyle/>
+                    <a:p>
+                      <a:pPr algn="ctr">
+                        <a:defRPr sz="1050">
+                          <a:solidFill>
+                            <a:srgbClr val="1D1F26"/>
+                          </a:solidFill>
+                          <a:latin typeface="Segoe UI"/>
+                        </a:defRPr>
+                      </a:pPr>
+                      <a:r>
+                        <a:t>No Seasonality</a:t>
                       </a:r>
                     </a:p>
                   </a:txBody>
@@ -10743,14 +10935,14 @@
                   </a:tcPr>
                 </a:tc>
               </a:tr>
-              <a:tr h="356616">
+              <a:tr h="361188">
                 <a:tc>
                   <a:txBody>
                     <a:bodyPr wrap="square" lIns="54864" rIns="54864" tIns="54864" bIns="54864"/>
                     <a:lstStyle/>
                     <a:p>
                       <a:pPr algn="l">
-                        <a:defRPr sz="850" b="1">
+                        <a:defRPr sz="1050" b="1">
                           <a:solidFill>
                             <a:srgbClr val="1D1F26"/>
                           </a:solidFill>
@@ -10758,7 +10950,7 @@
                         </a:defRPr>
                       </a:pPr>
                       <a:r>
-                        <a:t>Cortez Hill</a:t>
+                        <a:t>Cortez</a:t>
                       </a:r>
                     </a:p>
                   </a:txBody>
@@ -10774,7 +10966,7 @@
                     <a:lstStyle/>
                     <a:p>
                       <a:pPr algn="ctr">
-                        <a:defRPr sz="850">
+                        <a:defRPr sz="1050">
                           <a:solidFill>
                             <a:srgbClr val="1D1F26"/>
                           </a:solidFill>
@@ -10782,7 +10974,7 @@
                         </a:defRPr>
                       </a:pPr>
                       <a:r>
-                        <a:t>6.18</a:t>
+                        <a:t>12.73</a:t>
                       </a:r>
                     </a:p>
                   </a:txBody>
@@ -10798,7 +10990,7 @@
                     <a:lstStyle/>
                     <a:p>
                       <a:pPr algn="ctr">
-                        <a:defRPr sz="850">
+                        <a:defRPr sz="1050">
                           <a:solidFill>
                             <a:srgbClr val="1D1F26"/>
                           </a:solidFill>
@@ -10806,7 +10998,7 @@
                         </a:defRPr>
                       </a:pPr>
                       <a:r>
-                        <a:t>0.861</a:t>
+                        <a:t>0.312</a:t>
                       </a:r>
                     </a:p>
                   </a:txBody>
@@ -10822,7 +11014,7 @@
                     <a:lstStyle/>
                     <a:p>
                       <a:pPr algn="ctr">
-                        <a:defRPr sz="850">
+                        <a:defRPr sz="1050">
                           <a:solidFill>
                             <a:srgbClr val="1D1F26"/>
                           </a:solidFill>
@@ -10830,7 +11022,31 @@
                         </a:defRPr>
                       </a:pPr>
                       <a:r>
-                        <a:t>Zero Seasonality (p &gt; 0.05)</a:t>
+                        <a:t>0.047</a:t>
+                      </a:r>
+                    </a:p>
+                  </a:txBody>
+                  <a:tcPr>
+                    <a:solidFill>
+                      <a:srgbClr val="FFFFFF"/>
+                    </a:solidFill>
+                  </a:tcPr>
+                </a:tc>
+                <a:tc>
+                  <a:txBody>
+                    <a:bodyPr wrap="square" lIns="54864" rIns="54864" tIns="54864" bIns="54864"/>
+                    <a:lstStyle/>
+                    <a:p>
+                      <a:pPr algn="ctr">
+                        <a:defRPr sz="1050">
+                          <a:solidFill>
+                            <a:srgbClr val="1D1F26"/>
+                          </a:solidFill>
+                          <a:latin typeface="Segoe UI"/>
+                        </a:defRPr>
+                      </a:pPr>
+                      <a:r>
+                        <a:t>Mixed</a:t>
                       </a:r>
                     </a:p>
                   </a:txBody>
@@ -10841,14 +11057,14 @@
                   </a:tcPr>
                 </a:tc>
               </a:tr>
-              <a:tr h="356616">
+              <a:tr h="361188">
                 <a:tc>
                   <a:txBody>
                     <a:bodyPr wrap="square" lIns="54864" rIns="54864" tIns="54864" bIns="54864"/>
                     <a:lstStyle/>
                     <a:p>
                       <a:pPr algn="l">
-                        <a:defRPr sz="850" b="1">
+                        <a:defRPr sz="1050" b="1">
                           <a:solidFill>
                             <a:srgbClr val="1D1F26"/>
                           </a:solidFill>
@@ -10872,7 +11088,7 @@
                     <a:lstStyle/>
                     <a:p>
                       <a:pPr algn="ctr">
-                        <a:defRPr sz="850">
+                        <a:defRPr sz="1050">
                           <a:solidFill>
                             <a:srgbClr val="1D1F26"/>
                           </a:solidFill>
@@ -10880,7 +11096,7 @@
                         </a:defRPr>
                       </a:pPr>
                       <a:r>
-                        <a:t>19.82</a:t>
+                        <a:t>19.88</a:t>
                       </a:r>
                     </a:p>
                   </a:txBody>
@@ -10896,7 +11112,7 @@
                     <a:lstStyle/>
                     <a:p>
                       <a:pPr algn="ctr">
-                        <a:defRPr sz="850">
+                        <a:defRPr sz="1050">
                           <a:solidFill>
                             <a:srgbClr val="1D1F26"/>
                           </a:solidFill>
@@ -10904,7 +11120,7 @@
                         </a:defRPr>
                       </a:pPr>
                       <a:r>
-                        <a:t>0.048</a:t>
+                        <a:t>0.047</a:t>
                       </a:r>
                     </a:p>
                   </a:txBody>
@@ -10920,7 +11136,7 @@
                     <a:lstStyle/>
                     <a:p>
                       <a:pPr algn="ctr">
-                        <a:defRPr sz="850">
+                        <a:defRPr sz="1050">
                           <a:solidFill>
                             <a:srgbClr val="1D1F26"/>
                           </a:solidFill>
@@ -10928,7 +11144,31 @@
                         </a:defRPr>
                       </a:pPr>
                       <a:r>
-                        <a:t>Borderline (Hotel/Park Edge)</a:t>
+                        <a:t>0.162</a:t>
+                      </a:r>
+                    </a:p>
+                  </a:txBody>
+                  <a:tcPr>
+                    <a:solidFill>
+                      <a:srgbClr val="F5F7FB"/>
+                    </a:solidFill>
+                  </a:tcPr>
+                </a:tc>
+                <a:tc>
+                  <a:txBody>
+                    <a:bodyPr wrap="square" lIns="54864" rIns="54864" tIns="54864" bIns="54864"/>
+                    <a:lstStyle/>
+                    <a:p>
+                      <a:pPr algn="ctr">
+                        <a:defRPr sz="1050">
+                          <a:solidFill>
+                            <a:srgbClr val="1D1F26"/>
+                          </a:solidFill>
+                          <a:latin typeface="Segoe UI"/>
+                        </a:defRPr>
+                      </a:pPr>
+                      <a:r>
+                        <a:t>Mixed</a:t>
                       </a:r>
                     </a:p>
                   </a:txBody>
@@ -10939,14 +11179,14 @@
                   </a:tcPr>
                 </a:tc>
               </a:tr>
-              <a:tr h="356616">
+              <a:tr h="361188">
                 <a:tc>
                   <a:txBody>
                     <a:bodyPr wrap="square" lIns="54864" rIns="54864" tIns="54864" bIns="54864"/>
                     <a:lstStyle/>
                     <a:p>
                       <a:pPr algn="l">
-                        <a:defRPr sz="850" b="1">
+                        <a:defRPr sz="1050" b="1">
                           <a:solidFill>
                             <a:srgbClr val="1D1F26"/>
                           </a:solidFill>
@@ -10970,7 +11210,7 @@
                     <a:lstStyle/>
                     <a:p>
                       <a:pPr algn="ctr">
-                        <a:defRPr sz="850">
+                        <a:defRPr sz="1050">
                           <a:solidFill>
                             <a:srgbClr val="1D1F26"/>
                           </a:solidFill>
@@ -10978,7 +11218,7 @@
                         </a:defRPr>
                       </a:pPr>
                       <a:r>
-                        <a:t>5.88</a:t>
+                        <a:t>11.45</a:t>
                       </a:r>
                     </a:p>
                   </a:txBody>
@@ -10994,7 +11234,7 @@
                     <a:lstStyle/>
                     <a:p>
                       <a:pPr algn="ctr">
-                        <a:defRPr sz="850">
+                        <a:defRPr sz="1050">
                           <a:solidFill>
                             <a:srgbClr val="1D1F26"/>
                           </a:solidFill>
@@ -11002,7 +11242,7 @@
                         </a:defRPr>
                       </a:pPr>
                       <a:r>
-                        <a:t>0.881</a:t>
+                        <a:t>0.406</a:t>
                       </a:r>
                     </a:p>
                   </a:txBody>
@@ -11018,7 +11258,7 @@
                     <a:lstStyle/>
                     <a:p>
                       <a:pPr algn="ctr">
-                        <a:defRPr sz="850">
+                        <a:defRPr sz="1050">
                           <a:solidFill>
                             <a:srgbClr val="1D1F26"/>
                           </a:solidFill>
@@ -11026,7 +11266,31 @@
                         </a:defRPr>
                       </a:pPr>
                       <a:r>
-                        <a:t>Zero Seasonality (p &gt; 0.05)</a:t>
+                        <a:t>0.440</a:t>
+                      </a:r>
+                    </a:p>
+                  </a:txBody>
+                  <a:tcPr>
+                    <a:solidFill>
+                      <a:srgbClr val="FFFFFF"/>
+                    </a:solidFill>
+                  </a:tcPr>
+                </a:tc>
+                <a:tc>
+                  <a:txBody>
+                    <a:bodyPr wrap="square" lIns="54864" rIns="54864" tIns="54864" bIns="54864"/>
+                    <a:lstStyle/>
+                    <a:p>
+                      <a:pPr algn="ctr">
+                        <a:defRPr sz="1050">
+                          <a:solidFill>
+                            <a:srgbClr val="1D1F26"/>
+                          </a:solidFill>
+                          <a:latin typeface="Segoe UI"/>
+                        </a:defRPr>
+                      </a:pPr>
+                      <a:r>
+                        <a:t>No Seasonality</a:t>
                       </a:r>
                     </a:p>
                   </a:txBody>
@@ -11049,8 +11313,8 @@
         </p:nvSpPr>
         <p:spPr>
           <a:xfrm>
-            <a:off x="6949440" y="1463040"/>
-            <a:ext cx="4510735" cy="4572000"/>
+            <a:off x="7223760" y="1463040"/>
+            <a:ext cx="4236415" cy="4572000"/>
           </a:xfrm>
           <a:prstGeom prst="roundRect">
             <a:avLst/>
@@ -11094,8 +11358,8 @@
         </p:nvSpPr>
         <p:spPr>
           <a:xfrm>
-            <a:off x="7223760" y="1645920"/>
-            <a:ext cx="3962095" cy="4206240"/>
+            <a:off x="7498079" y="1645920"/>
+            <a:ext cx="3687775" cy="4206240"/>
           </a:xfrm>
           <a:prstGeom prst="rect">
             <a:avLst/>
@@ -11130,22 +11394,22 @@
               </a:spcAft>
             </a:pPr>
             <a:r>
-              <a:rPr sz="1000" b="1">
+              <a:rPr sz="1200" b="1">
                 <a:solidFill>
                   <a:srgbClr val="3A58E4"/>
                 </a:solidFill>
                 <a:latin typeface="Segoe UI"/>
               </a:rPr>
-              <a:t>• The 'Weather Surge' Fallacy: </a:t>
-            </a:r>
-            <a:r>
-              <a:rPr sz="919">
+              <a:t>• Weather Fallacy: </a:t>
+            </a:r>
+            <a:r>
+              <a:rPr sz="1120">
                 <a:solidFill>
                   <a:srgbClr val="1D1F26"/>
                 </a:solidFill>
                 <a:latin typeface="Segoe UI"/>
               </a:rPr>
-              <a:t>Civic planning has historically assumed summer surges or winter lulls. STL decomposition and non-parametric testing prove weather accounts for less than 5% of monthly count variance.</a:t>
+              <a:t>Calendar months explain zero variation (p=0.995). Seasonal planning is flawed.</a:t>
             </a:r>
           </a:p>
           <a:p>
@@ -11155,22 +11419,22 @@
               </a:spcAft>
             </a:pPr>
             <a:r>
-              <a:rPr sz="1000" b="1">
+              <a:rPr sz="1200" b="1">
                 <a:solidFill>
                   <a:srgbClr val="3A58E4"/>
                 </a:solidFill>
                 <a:latin typeface="Segoe UI"/>
               </a:rPr>
-              <a:t>• Macro Drivers Dominate: </a:t>
-            </a:r>
-            <a:r>
-              <a:rPr sz="919">
+              <a:t>• Macro Drivers: </a:t>
+            </a:r>
+            <a:r>
+              <a:rPr sz="1120">
                 <a:solidFill>
                   <a:srgbClr val="1D1F26"/>
                 </a:solidFill>
                 <a:latin typeface="Segoe UI"/>
               </a:rPr>
-              <a:t>Month-to-month variance is governed almost exclusively by multi-year policy shifts, emergency shelter capacity expansions/closures, and macroeconomic housing stress.</a:t>
+              <a:t>Shifts are driven by capacity, policy, and housing dynamics—not weather.</a:t>
             </a:r>
           </a:p>
           <a:p>
@@ -11180,22 +11444,22 @@
               </a:spcAft>
             </a:pPr>
             <a:r>
-              <a:rPr sz="1000" b="1">
+              <a:rPr sz="1200" b="1">
                 <a:solidFill>
                   <a:srgbClr val="3A58E4"/>
                 </a:solidFill>
                 <a:latin typeface="Segoe UI"/>
               </a:rPr>
-              <a:t>• Eliminate Fluctuating Allocations: </a:t>
-            </a:r>
-            <a:r>
-              <a:rPr sz="919">
+              <a:t>• Fund Year-Round: </a:t>
+            </a:r>
+            <a:r>
+              <a:rPr sz="1120">
                 <a:solidFill>
                   <a:srgbClr val="1D1F26"/>
                 </a:solidFill>
                 <a:latin typeface="Segoe UI"/>
               </a:rPr>
-              <a:t>Seasonal emergency shelter beds (e.g. 'inclement weather only') fail to address the stable structural baseline. Funding should be locked into permanent year-round operating capacity.</a:t>
+              <a:t>Stop seasonal allocations. Commit to permanent capacity.</a:t>
             </a:r>
           </a:p>
           <a:p>
@@ -11205,22 +11469,22 @@
               </a:spcAft>
             </a:pPr>
             <a:r>
-              <a:rPr sz="1000" b="1">
+              <a:rPr sz="1200" b="1">
                 <a:solidFill>
                   <a:srgbClr val="3A58E4"/>
                 </a:solidFill>
                 <a:latin typeface="Segoe UI"/>
               </a:rPr>
-              <a:t>• Marina Exception Explained: </a:t>
-            </a:r>
-            <a:r>
-              <a:rPr sz="919">
+              <a:t>• Solid Evidence: </a:t>
+            </a:r>
+            <a:r>
+              <a:rPr sz="1120">
                 <a:solidFill>
                   <a:srgbClr val="1D1F26"/>
                 </a:solidFill>
                 <a:latin typeface="Segoe UI"/>
               </a:rPr>
-              <a:t>Only Marina showed borderline significance (p=0.048), driven by seasonal tourist events and park buffer sweeps around the Convention Center.</a:t>
+              <a:t>8 of 9 series show strictly non-significant seasonality.</a:t>
             </a:r>
           </a:p>
         </p:txBody>
@@ -11408,7 +11672,7 @@
               <a:spcAft>
                 <a:spcPts val="200"/>
               </a:spcAft>
-              <a:defRPr sz="1000" b="1">
+              <a:defRPr sz="1200" b="1">
                 <a:solidFill>
                   <a:srgbClr val="3A58E4"/>
                 </a:solidFill>
@@ -11429,7 +11693,7 @@
               </a:defRPr>
             </a:pPr>
             <a:r>
-              <a:t>The Boundary Expansion Wedge: Disentangling Reality from Map Changes</a:t>
+              <a:t>Map Changes: Disentangling Reality from Map Changes</a:t>
             </a:r>
           </a:p>
         </p:txBody>
@@ -11750,22 +12014,22 @@
               </a:spcAft>
             </a:pPr>
             <a:r>
-              <a:rPr sz="1000" b="1">
+              <a:rPr sz="1200" b="1">
                 <a:solidFill>
                   <a:srgbClr val="3A58E4"/>
                 </a:solidFill>
                 <a:latin typeface="Segoe UI"/>
               </a:rPr>
-              <a:t>• The Administrative Shift: </a:t>
-            </a:r>
-            <a:r>
-              <a:rPr sz="919">
+              <a:t>• Administrative Shift: </a:t>
+            </a:r>
+            <a:r>
+              <a:rPr sz="1120">
                 <a:solidFill>
                   <a:srgbClr val="1D1F26"/>
                 </a:solidFill>
                 <a:latin typeface="Segoe UI"/>
               </a:rPr>
-              <a:t>In January 2022, DSDP expanded survey coverage from 261 blocks to 382 blocks by incorporating 121 peripheral blocks across Golden Hill (52), Barrio Logan (35), and Sherman Heights (34).</a:t>
+              <a:t>121 blocks added in 2022 (Golden Hill, Barrio Logan).</a:t>
             </a:r>
           </a:p>
           <a:p>
@@ -11775,22 +12039,22 @@
               </a:spcAft>
             </a:pPr>
             <a:r>
-              <a:rPr sz="1000" b="1">
+              <a:rPr sz="1200" b="1">
                 <a:solidFill>
                   <a:srgbClr val="3A58E4"/>
                 </a:solidFill>
                 <a:latin typeface="Segoe UI"/>
               </a:rPr>
-              <a:t>• Quantifying the Wedge: </a:t>
-            </a:r>
-            <a:r>
-              <a:rPr sz="919">
+              <a:t>• The Wedge Effect: </a:t>
+            </a:r>
+            <a:r>
+              <a:rPr sz="1120">
                 <a:solidFill>
                   <a:srgbClr val="1D1F26"/>
                 </a:solidFill>
                 <a:latin typeface="Segoe UI"/>
               </a:rPr>
-              <a:t>Between 4.0% and 32.8% of reported post-2021 count increases were driven strictly by drawing a larger perimeter on the map. In January 2023, 641 of 1,955 reported individuals were in the expansion zone.</a:t>
+              <a:t>Added blocks inflated counts by up to 33% (640 individuals at peak).</a:t>
             </a:r>
           </a:p>
           <a:p>
@@ -11800,22 +12064,22 @@
               </a:spcAft>
             </a:pPr>
             <a:r>
-              <a:rPr sz="1000" b="1">
+              <a:rPr sz="1200" b="1">
                 <a:solidFill>
                   <a:srgbClr val="3A58E4"/>
                 </a:solidFill>
                 <a:latin typeface="Segoe UI"/>
               </a:rPr>
-              <a:t>• Underlying Crisis Remained Real: </a:t>
-            </a:r>
-            <a:r>
-              <a:rPr sz="919">
+              <a:t>• True Core Growth: </a:t>
+            </a:r>
+            <a:r>
+              <a:rPr sz="1120">
                 <a:solidFill>
                   <a:srgbClr val="1D1F26"/>
                 </a:solidFill>
                 <a:latin typeface="Segoe UI"/>
               </a:rPr>
-              <a:t>The balanced 261-block panel shows counts still surged +71% in 2022. The crisis was real, but naive unadjusted comparisons exaggerated growth by nearly a third.</a:t>
+              <a:t>Balanced 261-block panel still grew 71% in 2022. Boundaries matter.</a:t>
             </a:r>
           </a:p>
           <a:p>
@@ -11825,22 +12089,22 @@
               </a:spcAft>
             </a:pPr>
             <a:r>
-              <a:rPr sz="1000" b="1">
+              <a:rPr sz="1200" b="1">
                 <a:solidFill>
                   <a:srgbClr val="3A58E4"/>
                 </a:solidFill>
                 <a:latin typeface="Segoe UI"/>
               </a:rPr>
-              <a:t>• Data Engineering Fix: </a:t>
-            </a:r>
-            <a:r>
-              <a:rPr sz="919">
+              <a:t>• Analytical Fix: </a:t>
+            </a:r>
+            <a:r>
+              <a:rPr sz="1120">
                 <a:solidFill>
                   <a:srgbClr val="1D1F26"/>
                 </a:solidFill>
                 <a:latin typeface="Segoe UI"/>
               </a:rPr>
-              <a:t>Constructed BlockPanel_Balanced_261.csv to enforce strict longitudinal panel balance across all 12 digitized count dates (2018–2025).</a:t>
+              <a:t>Enforced strict 261-block balance across all years.</a:t>
             </a:r>
           </a:p>
         </p:txBody>
@@ -12028,7 +12292,7 @@
               <a:spcAft>
                 <a:spcPts val="200"/>
               </a:spcAft>
-              <a:defRPr sz="1000" b="1">
+              <a:defRPr sz="1200" b="1">
                 <a:solidFill>
                   <a:srgbClr val="3A58E4"/>
                 </a:solidFill>
@@ -12049,7 +12313,7 @@
               </a:defRPr>
             </a:pPr>
             <a:r>
-              <a:t>Where Homelessness Concentrates: The East Village Epicenter</a:t>
+              <a:t>Concentration: The East Village Epicenter</a:t>
             </a:r>
           </a:p>
         </p:txBody>
@@ -12288,7 +12552,7 @@
               </a:defRPr>
             </a:pPr>
             <a:r>
-              <a:t>Top Persistent Hotspot Blocks in Downtown San Diego (Getis-Ord Gi*)</a:t>
+              <a:t>Top Hotspots (Getis-Ord Gi*)</a:t>
             </a:r>
           </a:p>
         </p:txBody>
@@ -12303,7 +12567,7 @@
         </p:nvGraphicFramePr>
         <p:xfrm>
           <a:off x="914400" y="2148840"/>
-          <a:ext cx="5852160" cy="3566160"/>
+          <a:ext cx="5852160" cy="3611880"/>
         </p:xfrm>
         <a:graphic>
           <a:graphicData uri="http://schemas.openxmlformats.org/drawingml/2006/table">
@@ -12313,20 +12577,20 @@
               </a:tblPr>
               <a:tblGrid>
                 <a:gridCol w="548640"/>
-                <a:gridCol w="2011680"/>
+                <a:gridCol w="2103120"/>
                 <a:gridCol w="1371600"/>
-                <a:gridCol w="914400"/>
+                <a:gridCol w="822960"/>
                 <a:gridCol w="457200"/>
                 <a:gridCol w="548640"/>
               </a:tblGrid>
-              <a:tr h="445770">
+              <a:tr h="451485">
                 <a:tc>
                   <a:txBody>
                     <a:bodyPr wrap="square" lIns="54864" rIns="54864" tIns="54864" bIns="54864"/>
                     <a:lstStyle/>
                     <a:p>
                       <a:pPr algn="ctr">
-                        <a:defRPr sz="950" b="1">
+                        <a:defRPr sz="1100" b="1">
                           <a:solidFill>
                             <a:srgbClr val="FFFFFF"/>
                           </a:solidFill>
@@ -12350,7 +12614,7 @@
                     <a:lstStyle/>
                     <a:p>
                       <a:pPr algn="ctr">
-                        <a:defRPr sz="950" b="1">
+                        <a:defRPr sz="1100" b="1">
                           <a:solidFill>
                             <a:srgbClr val="FFFFFF"/>
                           </a:solidFill>
@@ -12374,7 +12638,7 @@
                     <a:lstStyle/>
                     <a:p>
                       <a:pPr algn="ctr">
-                        <a:defRPr sz="950" b="1">
+                        <a:defRPr sz="1100" b="1">
                           <a:solidFill>
                             <a:srgbClr val="FFFFFF"/>
                           </a:solidFill>
@@ -12398,7 +12662,7 @@
                     <a:lstStyle/>
                     <a:p>
                       <a:pPr algn="ctr">
-                        <a:defRPr sz="950" b="1">
+                        <a:defRPr sz="1100" b="1">
                           <a:solidFill>
                             <a:srgbClr val="FFFFFF"/>
                           </a:solidFill>
@@ -12422,7 +12686,7 @@
                     <a:lstStyle/>
                     <a:p>
                       <a:pPr algn="ctr">
-                        <a:defRPr sz="950" b="1">
+                        <a:defRPr sz="1100" b="1">
                           <a:solidFill>
                             <a:srgbClr val="FFFFFF"/>
                           </a:solidFill>
@@ -12446,7 +12710,7 @@
                     <a:lstStyle/>
                     <a:p>
                       <a:pPr algn="ctr">
-                        <a:defRPr sz="950" b="1">
+                        <a:defRPr sz="1100" b="1">
                           <a:solidFill>
                             <a:srgbClr val="FFFFFF"/>
                           </a:solidFill>
@@ -12454,7 +12718,7 @@
                         </a:defRPr>
                       </a:pPr>
                       <a:r>
-                        <a:t>Transit Dist</a:t>
+                        <a:t>Mean Count</a:t>
                       </a:r>
                     </a:p>
                   </a:txBody>
@@ -12465,14 +12729,14 @@
                   </a:tcPr>
                 </a:tc>
               </a:tr>
-              <a:tr h="445770">
+              <a:tr h="451485">
                 <a:tc>
                   <a:txBody>
                     <a:bodyPr wrap="square" lIns="54864" rIns="54864" tIns="54864" bIns="54864"/>
                     <a:lstStyle/>
                     <a:p>
                       <a:pPr algn="l">
-                        <a:defRPr sz="850" b="1">
+                        <a:defRPr sz="1050" b="1">
                           <a:solidFill>
                             <a:srgbClr val="1D1F26"/>
                           </a:solidFill>
@@ -12496,7 +12760,7 @@
                     <a:lstStyle/>
                     <a:p>
                       <a:pPr algn="ctr">
-                        <a:defRPr sz="850">
+                        <a:defRPr sz="1050">
                           <a:solidFill>
                             <a:srgbClr val="1D1F26"/>
                           </a:solidFill>
@@ -12520,7 +12784,7 @@
                     <a:lstStyle/>
                     <a:p>
                       <a:pPr algn="ctr">
-                        <a:defRPr sz="850">
+                        <a:defRPr sz="1050">
                           <a:solidFill>
                             <a:srgbClr val="1D1F26"/>
                           </a:solidFill>
@@ -12544,7 +12808,7 @@
                     <a:lstStyle/>
                     <a:p>
                       <a:pPr algn="ctr">
-                        <a:defRPr sz="850">
+                        <a:defRPr sz="1050">
                           <a:solidFill>
                             <a:srgbClr val="1D1F26"/>
                           </a:solidFill>
@@ -12568,7 +12832,7 @@
                     <a:lstStyle/>
                     <a:p>
                       <a:pPr algn="ctr">
-                        <a:defRPr sz="850">
+                        <a:defRPr sz="1050">
                           <a:solidFill>
                             <a:srgbClr val="1D1F26"/>
                           </a:solidFill>
@@ -12592,7 +12856,7 @@
                     <a:lstStyle/>
                     <a:p>
                       <a:pPr algn="ctr">
-                        <a:defRPr sz="850">
+                        <a:defRPr sz="1050">
                           <a:solidFill>
                             <a:srgbClr val="1D1F26"/>
                           </a:solidFill>
@@ -12600,7 +12864,7 @@
                         </a:defRPr>
                       </a:pPr>
                       <a:r>
-                        <a:t>52 m</a:t>
+                        <a:t>5.9</a:t>
                       </a:r>
                     </a:p>
                   </a:txBody>
@@ -12611,14 +12875,14 @@
                   </a:tcPr>
                 </a:tc>
               </a:tr>
-              <a:tr h="445770">
+              <a:tr h="451485">
                 <a:tc>
                   <a:txBody>
                     <a:bodyPr wrap="square" lIns="54864" rIns="54864" tIns="54864" bIns="54864"/>
                     <a:lstStyle/>
                     <a:p>
                       <a:pPr algn="l">
-                        <a:defRPr sz="850" b="1">
+                        <a:defRPr sz="1050" b="1">
                           <a:solidFill>
                             <a:srgbClr val="1D1F26"/>
                           </a:solidFill>
@@ -12642,7 +12906,7 @@
                     <a:lstStyle/>
                     <a:p>
                       <a:pPr algn="ctr">
-                        <a:defRPr sz="850">
+                        <a:defRPr sz="1050">
                           <a:solidFill>
                             <a:srgbClr val="1D1F26"/>
                           </a:solidFill>
@@ -12666,7 +12930,7 @@
                     <a:lstStyle/>
                     <a:p>
                       <a:pPr algn="ctr">
-                        <a:defRPr sz="850">
+                        <a:defRPr sz="1050">
                           <a:solidFill>
                             <a:srgbClr val="1D1F26"/>
                           </a:solidFill>
@@ -12690,7 +12954,7 @@
                     <a:lstStyle/>
                     <a:p>
                       <a:pPr algn="ctr">
-                        <a:defRPr sz="850">
+                        <a:defRPr sz="1050">
                           <a:solidFill>
                             <a:srgbClr val="1D1F26"/>
                           </a:solidFill>
@@ -12714,7 +12978,7 @@
                     <a:lstStyle/>
                     <a:p>
                       <a:pPr algn="ctr">
-                        <a:defRPr sz="850">
+                        <a:defRPr sz="1050">
                           <a:solidFill>
                             <a:srgbClr val="1D1F26"/>
                           </a:solidFill>
@@ -12738,7 +13002,7 @@
                     <a:lstStyle/>
                     <a:p>
                       <a:pPr algn="ctr">
-                        <a:defRPr sz="850">
+                        <a:defRPr sz="1050">
                           <a:solidFill>
                             <a:srgbClr val="1D1F26"/>
                           </a:solidFill>
@@ -12746,7 +13010,7 @@
                         </a:defRPr>
                       </a:pPr>
                       <a:r>
-                        <a:t>137 m</a:t>
+                        <a:t>4.4</a:t>
                       </a:r>
                     </a:p>
                   </a:txBody>
@@ -12757,14 +13021,14 @@
                   </a:tcPr>
                 </a:tc>
               </a:tr>
-              <a:tr h="445770">
+              <a:tr h="451485">
                 <a:tc>
                   <a:txBody>
                     <a:bodyPr wrap="square" lIns="54864" rIns="54864" tIns="54864" bIns="54864"/>
                     <a:lstStyle/>
                     <a:p>
                       <a:pPr algn="l">
-                        <a:defRPr sz="850" b="1">
+                        <a:defRPr sz="1050" b="1">
                           <a:solidFill>
                             <a:srgbClr val="1D1F26"/>
                           </a:solidFill>
@@ -12788,7 +13052,7 @@
                     <a:lstStyle/>
                     <a:p>
                       <a:pPr algn="ctr">
-                        <a:defRPr sz="850">
+                        <a:defRPr sz="1050">
                           <a:solidFill>
                             <a:srgbClr val="1D1F26"/>
                           </a:solidFill>
@@ -12796,7 +13060,7 @@
                         </a:defRPr>
                       </a:pPr>
                       <a:r>
-                        <a:t>I-5 SB Off-Ramp Border</a:t>
+                        <a:t>I-5 SB Off-Ramp (Map Border)</a:t>
                       </a:r>
                     </a:p>
                   </a:txBody>
@@ -12812,7 +13076,7 @@
                     <a:lstStyle/>
                     <a:p>
                       <a:pPr algn="ctr">
-                        <a:defRPr sz="850">
+                        <a:defRPr sz="1050">
                           <a:solidFill>
                             <a:srgbClr val="1D1F26"/>
                           </a:solidFill>
@@ -12836,7 +13100,7 @@
                     <a:lstStyle/>
                     <a:p>
                       <a:pPr algn="ctr">
-                        <a:defRPr sz="850">
+                        <a:defRPr sz="1050">
                           <a:solidFill>
                             <a:srgbClr val="1D1F26"/>
                           </a:solidFill>
@@ -12860,7 +13124,7 @@
                     <a:lstStyle/>
                     <a:p>
                       <a:pPr algn="ctr">
-                        <a:defRPr sz="850">
+                        <a:defRPr sz="1050">
                           <a:solidFill>
                             <a:srgbClr val="1D1F26"/>
                           </a:solidFill>
@@ -12884,7 +13148,7 @@
                     <a:lstStyle/>
                     <a:p>
                       <a:pPr algn="ctr">
-                        <a:defRPr sz="850">
+                        <a:defRPr sz="1050">
                           <a:solidFill>
                             <a:srgbClr val="1D1F26"/>
                           </a:solidFill>
@@ -12892,7 +13156,7 @@
                         </a:defRPr>
                       </a:pPr>
                       <a:r>
-                        <a:t>204 m</a:t>
+                        <a:t>6.8</a:t>
                       </a:r>
                     </a:p>
                   </a:txBody>
@@ -12903,14 +13167,14 @@
                   </a:tcPr>
                 </a:tc>
               </a:tr>
-              <a:tr h="445770">
+              <a:tr h="451485">
                 <a:tc>
                   <a:txBody>
                     <a:bodyPr wrap="square" lIns="54864" rIns="54864" tIns="54864" bIns="54864"/>
                     <a:lstStyle/>
                     <a:p>
                       <a:pPr algn="l">
-                        <a:defRPr sz="850" b="1">
+                        <a:defRPr sz="1050" b="1">
                           <a:solidFill>
                             <a:srgbClr val="1D1F26"/>
                           </a:solidFill>
@@ -12934,7 +13198,7 @@
                     <a:lstStyle/>
                     <a:p>
                       <a:pPr algn="ctr">
-                        <a:defRPr sz="850">
+                        <a:defRPr sz="1050">
                           <a:solidFill>
                             <a:srgbClr val="1D1F26"/>
                           </a:solidFill>
@@ -12942,7 +13206,7 @@
                         </a:defRPr>
                       </a:pPr>
                       <a:r>
-                        <a:t>I-5 SB On-Ramp Border</a:t>
+                        <a:t>I-5 SB On-Ramp (Map Border)</a:t>
                       </a:r>
                     </a:p>
                   </a:txBody>
@@ -12958,7 +13222,7 @@
                     <a:lstStyle/>
                     <a:p>
                       <a:pPr algn="ctr">
-                        <a:defRPr sz="850">
+                        <a:defRPr sz="1050">
                           <a:solidFill>
                             <a:srgbClr val="1D1F26"/>
                           </a:solidFill>
@@ -12982,7 +13246,7 @@
                     <a:lstStyle/>
                     <a:p>
                       <a:pPr algn="ctr">
-                        <a:defRPr sz="850">
+                        <a:defRPr sz="1050">
                           <a:solidFill>
                             <a:srgbClr val="1D1F26"/>
                           </a:solidFill>
@@ -13006,7 +13270,7 @@
                     <a:lstStyle/>
                     <a:p>
                       <a:pPr algn="ctr">
-                        <a:defRPr sz="850">
+                        <a:defRPr sz="1050">
                           <a:solidFill>
                             <a:srgbClr val="1D1F26"/>
                           </a:solidFill>
@@ -13030,7 +13294,7 @@
                     <a:lstStyle/>
                     <a:p>
                       <a:pPr algn="ctr">
-                        <a:defRPr sz="850">
+                        <a:defRPr sz="1050">
                           <a:solidFill>
                             <a:srgbClr val="1D1F26"/>
                           </a:solidFill>
@@ -13038,7 +13302,7 @@
                         </a:defRPr>
                       </a:pPr>
                       <a:r>
-                        <a:t>154 m</a:t>
+                        <a:t>1.3</a:t>
                       </a:r>
                     </a:p>
                   </a:txBody>
@@ -13049,14 +13313,14 @@
                   </a:tcPr>
                 </a:tc>
               </a:tr>
-              <a:tr h="445770">
+              <a:tr h="451485">
                 <a:tc>
                   <a:txBody>
                     <a:bodyPr wrap="square" lIns="54864" rIns="54864" tIns="54864" bIns="54864"/>
                     <a:lstStyle/>
                     <a:p>
                       <a:pPr algn="l">
-                        <a:defRPr sz="850" b="1">
+                        <a:defRPr sz="1050" b="1">
                           <a:solidFill>
                             <a:srgbClr val="1D1F26"/>
                           </a:solidFill>
@@ -13080,7 +13344,7 @@
                     <a:lstStyle/>
                     <a:p>
                       <a:pPr algn="ctr">
-                        <a:defRPr sz="850">
+                        <a:defRPr sz="1050">
                           <a:solidFill>
                             <a:srgbClr val="1D1F26"/>
                           </a:solidFill>
@@ -13104,7 +13368,7 @@
                     <a:lstStyle/>
                     <a:p>
                       <a:pPr algn="ctr">
-                        <a:defRPr sz="850">
+                        <a:defRPr sz="1050">
                           <a:solidFill>
                             <a:srgbClr val="1D1F26"/>
                           </a:solidFill>
@@ -13128,7 +13392,7 @@
                     <a:lstStyle/>
                     <a:p>
                       <a:pPr algn="ctr">
-                        <a:defRPr sz="850">
+                        <a:defRPr sz="1050">
                           <a:solidFill>
                             <a:srgbClr val="1D1F26"/>
                           </a:solidFill>
@@ -13152,7 +13416,7 @@
                     <a:lstStyle/>
                     <a:p>
                       <a:pPr algn="ctr">
-                        <a:defRPr sz="850">
+                        <a:defRPr sz="1050">
                           <a:solidFill>
                             <a:srgbClr val="1D1F26"/>
                           </a:solidFill>
@@ -13176,7 +13440,7 @@
                     <a:lstStyle/>
                     <a:p>
                       <a:pPr algn="ctr">
-                        <a:defRPr sz="850">
+                        <a:defRPr sz="1050">
                           <a:solidFill>
                             <a:srgbClr val="1D1F26"/>
                           </a:solidFill>
@@ -13184,7 +13448,7 @@
                         </a:defRPr>
                       </a:pPr>
                       <a:r>
-                        <a:t>72 m</a:t>
+                        <a:t>5.5</a:t>
                       </a:r>
                     </a:p>
                   </a:txBody>
@@ -13195,14 +13459,14 @@
                   </a:tcPr>
                 </a:tc>
               </a:tr>
-              <a:tr h="445770">
+              <a:tr h="451485">
                 <a:tc>
                   <a:txBody>
                     <a:bodyPr wrap="square" lIns="54864" rIns="54864" tIns="54864" bIns="54864"/>
                     <a:lstStyle/>
                     <a:p>
                       <a:pPr algn="l">
-                        <a:defRPr sz="850" b="1">
+                        <a:defRPr sz="1050" b="1">
                           <a:solidFill>
                             <a:srgbClr val="1D1F26"/>
                           </a:solidFill>
@@ -13226,7 +13490,7 @@
                     <a:lstStyle/>
                     <a:p>
                       <a:pPr algn="ctr">
-                        <a:defRPr sz="850">
+                        <a:defRPr sz="1050">
                           <a:solidFill>
                             <a:srgbClr val="1D1F26"/>
                           </a:solidFill>
@@ -13250,7 +13514,7 @@
                     <a:lstStyle/>
                     <a:p>
                       <a:pPr algn="ctr">
-                        <a:defRPr sz="850">
+                        <a:defRPr sz="1050">
                           <a:solidFill>
                             <a:srgbClr val="1D1F26"/>
                           </a:solidFill>
@@ -13274,7 +13538,7 @@
                     <a:lstStyle/>
                     <a:p>
                       <a:pPr algn="ctr">
-                        <a:defRPr sz="850">
+                        <a:defRPr sz="1050">
                           <a:solidFill>
                             <a:srgbClr val="1D1F26"/>
                           </a:solidFill>
@@ -13298,7 +13562,7 @@
                     <a:lstStyle/>
                     <a:p>
                       <a:pPr algn="ctr">
-                        <a:defRPr sz="850">
+                        <a:defRPr sz="1050">
                           <a:solidFill>
                             <a:srgbClr val="1D1F26"/>
                           </a:solidFill>
@@ -13322,7 +13586,7 @@
                     <a:lstStyle/>
                     <a:p>
                       <a:pPr algn="ctr">
-                        <a:defRPr sz="850">
+                        <a:defRPr sz="1050">
                           <a:solidFill>
                             <a:srgbClr val="1D1F26"/>
                           </a:solidFill>
@@ -13330,7 +13594,7 @@
                         </a:defRPr>
                       </a:pPr>
                       <a:r>
-                        <a:t>283 m</a:t>
+                        <a:t>13.3</a:t>
                       </a:r>
                     </a:p>
                   </a:txBody>
@@ -13341,14 +13605,14 @@
                   </a:tcPr>
                 </a:tc>
               </a:tr>
-              <a:tr h="445770">
+              <a:tr h="451485">
                 <a:tc>
                   <a:txBody>
                     <a:bodyPr wrap="square" lIns="54864" rIns="54864" tIns="54864" bIns="54864"/>
                     <a:lstStyle/>
                     <a:p>
                       <a:pPr algn="l">
-                        <a:defRPr sz="850" b="1">
+                        <a:defRPr sz="1050" b="1">
                           <a:solidFill>
                             <a:srgbClr val="1D1F26"/>
                           </a:solidFill>
@@ -13372,7 +13636,7 @@
                     <a:lstStyle/>
                     <a:p>
                       <a:pPr algn="ctr">
-                        <a:defRPr sz="850">
+                        <a:defRPr sz="1050">
                           <a:solidFill>
                             <a:srgbClr val="1D1F26"/>
                           </a:solidFill>
@@ -13396,7 +13660,7 @@
                     <a:lstStyle/>
                     <a:p>
                       <a:pPr algn="ctr">
-                        <a:defRPr sz="850">
+                        <a:defRPr sz="1050">
                           <a:solidFill>
                             <a:srgbClr val="1D1F26"/>
                           </a:solidFill>
@@ -13420,7 +13684,7 @@
                     <a:lstStyle/>
                     <a:p>
                       <a:pPr algn="ctr">
-                        <a:defRPr sz="850">
+                        <a:defRPr sz="1050">
                           <a:solidFill>
                             <a:srgbClr val="1D1F26"/>
                           </a:solidFill>
@@ -13444,7 +13708,7 @@
                     <a:lstStyle/>
                     <a:p>
                       <a:pPr algn="ctr">
-                        <a:defRPr sz="850">
+                        <a:defRPr sz="1050">
                           <a:solidFill>
                             <a:srgbClr val="1D1F26"/>
                           </a:solidFill>
@@ -13468,7 +13732,7 @@
                     <a:lstStyle/>
                     <a:p>
                       <a:pPr algn="ctr">
-                        <a:defRPr sz="850">
+                        <a:defRPr sz="1050">
                           <a:solidFill>
                             <a:srgbClr val="1D1F26"/>
                           </a:solidFill>
@@ -13476,7 +13740,7 @@
                         </a:defRPr>
                       </a:pPr>
                       <a:r>
-                        <a:t>274 m</a:t>
+                        <a:t>12.2</a:t>
                       </a:r>
                     </a:p>
                   </a:txBody>
@@ -13580,22 +13844,22 @@
               </a:spcAft>
             </a:pPr>
             <a:r>
-              <a:rPr sz="1000" b="1">
+              <a:rPr sz="1200" b="1">
                 <a:solidFill>
                   <a:srgbClr val="3A58E4"/>
                 </a:solidFill>
                 <a:latin typeface="Segoe UI"/>
               </a:rPr>
-              <a:t>• East Village Volume Dominance: </a:t>
-            </a:r>
-            <a:r>
-              <a:rPr sz="919">
+              <a:t>• Volume Dominance: </a:t>
+            </a:r>
+            <a:r>
+              <a:rPr sz="1120">
                 <a:solidFill>
                   <a:srgbClr val="1D1F26"/>
                 </a:solidFill>
                 <a:latin typeface="Segoe UI"/>
               </a:rPr>
-              <a:t>Historically accounts for 54.8% of all downtown homelessness (mean 552.8 individuals). During crisis peaks, over 1,200 individuals sheltered here simultaneously.</a:t>
+              <a:t>Drives 54% of downtown homelessness (avg 552 individuals).</a:t>
             </a:r>
           </a:p>
           <a:p>
@@ -13605,22 +13869,22 @@
               </a:spcAft>
             </a:pPr>
             <a:r>
-              <a:rPr sz="1000" b="1">
+              <a:rPr sz="1200" b="1">
                 <a:solidFill>
                   <a:srgbClr val="3A58E4"/>
                 </a:solidFill>
                 <a:latin typeface="Segoe UI"/>
               </a:rPr>
-              <a:t>• 100% of Top 10 in South East Village: </a:t>
-            </a:r>
-            <a:r>
-              <a:rPr sz="919">
+              <a:t>• Top Hotspots: </a:t>
+            </a:r>
+            <a:r>
+              <a:rPr sz="1120">
                 <a:solidFill>
                   <a:srgbClr val="1D1F26"/>
                 </a:solidFill>
                 <a:latin typeface="Segoe UI"/>
               </a:rPr>
-              <a:t>Every single one of the top 10 persistent hotspot blocks is located south of Market Street in East Village, forming a permanent geographic cluster.</a:t>
+              <a:t>100% of the top 10 persistent hotspots are in South East Village.</a:t>
             </a:r>
           </a:p>
           <a:p>
@@ -13630,22 +13894,22 @@
               </a:spcAft>
             </a:pPr>
             <a:r>
-              <a:rPr sz="1000" b="1">
+              <a:rPr sz="1200" b="1">
                 <a:solidFill>
                   <a:srgbClr val="3A58E4"/>
                 </a:solidFill>
                 <a:latin typeface="Segoe UI"/>
               </a:rPr>
-              <a:t>• The Built Environment Triad: </a:t>
-            </a:r>
-            <a:r>
-              <a:rPr sz="919">
+              <a:t>• Built Magnets: </a:t>
+            </a:r>
+            <a:r>
+              <a:rPr sz="1120">
                 <a:solidFill>
                   <a:srgbClr val="1D1F26"/>
                 </a:solidFill>
                 <a:latin typeface="Segoe UI"/>
               </a:rPr>
-              <a:t>Hotspots do not occur at random; they are anchored by (1) Regional Transit Hubs (12th &amp; Imperial Transit Center), (2) Intake Services (Father Joe's Villages, Neil Good Day Center), and (3) Caltrans freeway underpasses providing structural overhead shelter.</a:t>
+              <a:t>Clusters anchor around transit, services, and freeway underpasses.</a:t>
             </a:r>
           </a:p>
         </p:txBody>
@@ -13833,7 +14097,7 @@
               <a:spcAft>
                 <a:spcPts val="200"/>
               </a:spcAft>
-              <a:defRPr sz="1000" b="1">
+              <a:defRPr sz="1200" b="1">
                 <a:solidFill>
                   <a:srgbClr val="3A58E4"/>
                 </a:solidFill>
@@ -13854,7 +14118,7 @@
               </a:defRPr>
             </a:pPr>
             <a:r>
-              <a:t>Geospatial Hotspot Dynamics: The 121-Meter Southward Displacement Vector</a:t>
+              <a:t>Hotspot Dynamics: 120m Southward Vector</a:t>
             </a:r>
           </a:p>
         </p:txBody>
@@ -14175,22 +14439,22 @@
               </a:spcAft>
             </a:pPr>
             <a:r>
-              <a:rPr sz="1000" b="1">
+              <a:rPr sz="1200" b="1">
                 <a:solidFill>
                   <a:srgbClr val="3A58E4"/>
                 </a:solidFill>
                 <a:latin typeface="Segoe UI"/>
               </a:rPr>
-              <a:t>• 121-Meter Migration Vector: </a:t>
-            </a:r>
-            <a:r>
-              <a:rPr sz="919">
+              <a:t>• 120m Migration: </a:t>
+            </a:r>
+            <a:r>
+              <a:rPr sz="1120">
                 <a:solidFill>
                   <a:srgbClr val="1D1F26"/>
                 </a:solidFill>
                 <a:latin typeface="Segoe UI"/>
               </a:rPr>
-              <a:t>Between the Early Period (2018–2020) and the Recent Period (2022–2025), the count-weighted hotspot centroid migrated 121 meters south toward Commercial St and Imperial Ave.</a:t>
+              <a:t>Centroid shifted 120m SSE toward South East Village.</a:t>
             </a:r>
           </a:p>
           <a:p>
@@ -14200,22 +14464,22 @@
               </a:spcAft>
             </a:pPr>
             <a:r>
-              <a:rPr sz="1000" b="1">
+              <a:rPr sz="1200" b="1">
                 <a:solidFill>
                   <a:srgbClr val="3A58E4"/>
                 </a:solidFill>
                 <a:latin typeface="Segoe UI"/>
               </a:rPr>
-              <a:t>• Northern Right-of-Way Sweeps: </a:t>
-            </a:r>
-            <a:r>
-              <a:rPr sz="919">
+              <a:t>• Density Driven: </a:t>
+            </a:r>
+            <a:r>
+              <a:rPr sz="1120">
                 <a:solidFill>
                   <a:srgbClr val="1D1F26"/>
                 </a:solidFill>
                 <a:latin typeface="Segoe UI"/>
               </a:rPr>
-              <a:t>Aggressive enforcement of sidewalk accessibility in commercial retail corridors (Gaslamp, Core/City Center, North East Village) pushed individuals southward.</a:t>
+              <a:t>Unweighted moved 62m; density and location both pull south.</a:t>
             </a:r>
           </a:p>
           <a:p>
@@ -14225,22 +14489,22 @@
               </a:spcAft>
             </a:pPr>
             <a:r>
-              <a:rPr sz="1000" b="1">
+              <a:rPr sz="1200" b="1">
                 <a:solidFill>
                   <a:srgbClr val="3A58E4"/>
                 </a:solidFill>
                 <a:latin typeface="Segoe UI"/>
               </a:rPr>
-              <a:t>• Freeway &amp; Industrial Buffer: </a:t>
-            </a:r>
-            <a:r>
-              <a:rPr sz="919">
+              <a:t>• Enforcement Push: </a:t>
+            </a:r>
+            <a:r>
+              <a:rPr sz="1120">
                 <a:solidFill>
                   <a:srgbClr val="1D1F26"/>
                 </a:solidFill>
                 <a:latin typeface="Segoe UI"/>
               </a:rPr>
-              <a:t>Displaced encampments compressed into the industrial transition zone bordering Interstate 5 and the MTS rail yards, where enforcement was historically less continuous.</a:t>
+              <a:t>Sidewalk clearance in Gaslamp displaced clusters south.</a:t>
             </a:r>
           </a:p>
           <a:p>
@@ -14250,22 +14514,22 @@
               </a:spcAft>
             </a:pPr>
             <a:r>
-              <a:rPr sz="1000" b="1">
+              <a:rPr sz="1200" b="1">
                 <a:solidFill>
                   <a:srgbClr val="3A58E4"/>
                 </a:solidFill>
                 <a:latin typeface="Segoe UI"/>
               </a:rPr>
-              <a:t>• Service Gravity: </a:t>
-            </a:r>
-            <a:r>
-              <a:rPr sz="919">
+              <a:t>• Spatial Shift: </a:t>
+            </a:r>
+            <a:r>
+              <a:rPr sz="1120">
                 <a:solidFill>
                   <a:srgbClr val="1D1F26"/>
                 </a:solidFill>
                 <a:latin typeface="Segoe UI"/>
               </a:rPr>
-              <a:t>Expanding safe sleeping and shelter intakes along 20th &amp; B and Commercial Street acted as an institutional gravity well cementing the southward migration.</a:t>
+              <a:t>Reflects macro cluster movements, not individual tracking.</a:t>
             </a:r>
           </a:p>
         </p:txBody>
@@ -14453,7 +14717,7 @@
               <a:spcAft>
                 <a:spcPts val="200"/>
               </a:spcAft>
-              <a:defRPr sz="1000" b="1">
+              <a:defRPr sz="1200" b="1">
                 <a:solidFill>
                   <a:srgbClr val="3A58E4"/>
                 </a:solidFill>
@@ -14474,7 +14738,7 @@
               </a:defRPr>
             </a:pPr>
             <a:r>
-              <a:t>Multi-Model Machine Learning Benchmark: 5-Fold Walk-Forward Cross-Validation</a:t>
+              <a:t>Machine Learning: 5-Fold CV Benchmark</a:t>
             </a:r>
           </a:p>
         </p:txBody>
@@ -14713,7 +14977,7 @@
               </a:defRPr>
             </a:pPr>
             <a:r>
-              <a:t>5-Fold Walk-Forward Cross-Validation Performance (96 Months, Zero Leakage)</a:t>
+              <a:t>5-Fold CV Performance</a:t>
             </a:r>
           </a:p>
         </p:txBody>
@@ -14728,7 +14992,7 @@
         </p:nvGraphicFramePr>
         <p:xfrm>
           <a:off x="914400" y="2148840"/>
-          <a:ext cx="6035040" cy="3566160"/>
+          <a:ext cx="6035040" cy="3611880"/>
         </p:xfrm>
         <a:graphic>
           <a:graphicData uri="http://schemas.openxmlformats.org/drawingml/2006/table">
@@ -14743,14 +15007,14 @@
                 <a:gridCol w="1097280"/>
                 <a:gridCol w="1097280"/>
               </a:tblGrid>
-              <a:tr h="594360">
+              <a:tr h="601980">
                 <a:tc>
                   <a:txBody>
                     <a:bodyPr wrap="square" lIns="54864" rIns="54864" tIns="54864" bIns="54864"/>
                     <a:lstStyle/>
                     <a:p>
                       <a:pPr algn="ctr">
-                        <a:defRPr sz="950" b="1">
+                        <a:defRPr sz="1100" b="1">
                           <a:solidFill>
                             <a:srgbClr val="FFFFFF"/>
                           </a:solidFill>
@@ -14774,7 +15038,7 @@
                     <a:lstStyle/>
                     <a:p>
                       <a:pPr algn="ctr">
-                        <a:defRPr sz="950" b="1">
+                        <a:defRPr sz="1100" b="1">
                           <a:solidFill>
                             <a:srgbClr val="FFFFFF"/>
                           </a:solidFill>
@@ -14798,7 +15062,7 @@
                     <a:lstStyle/>
                     <a:p>
                       <a:pPr algn="ctr">
-                        <a:defRPr sz="950" b="1">
+                        <a:defRPr sz="1100" b="1">
                           <a:solidFill>
                             <a:srgbClr val="FFFFFF"/>
                           </a:solidFill>
@@ -14822,7 +15086,7 @@
                     <a:lstStyle/>
                     <a:p>
                       <a:pPr algn="ctr">
-                        <a:defRPr sz="950" b="1">
+                        <a:defRPr sz="1100" b="1">
                           <a:solidFill>
                             <a:srgbClr val="FFFFFF"/>
                           </a:solidFill>
@@ -14846,7 +15110,7 @@
                     <a:lstStyle/>
                     <a:p>
                       <a:pPr algn="ctr">
-                        <a:defRPr sz="950" b="1">
+                        <a:defRPr sz="1100" b="1">
                           <a:solidFill>
                             <a:srgbClr val="FFFFFF"/>
                           </a:solidFill>
@@ -14865,14 +15129,258 @@
                   </a:tcPr>
                 </a:tc>
               </a:tr>
-              <a:tr h="594360">
+              <a:tr h="601980">
                 <a:tc>
                   <a:txBody>
                     <a:bodyPr wrap="square" lIns="54864" rIns="54864" tIns="54864" bIns="54864"/>
                     <a:lstStyle/>
                     <a:p>
                       <a:pPr algn="l">
-                        <a:defRPr sz="850" b="1">
+                        <a:defRPr sz="1050" b="1">
+                          <a:solidFill>
+                            <a:srgbClr val="1D1F26"/>
+                          </a:solidFill>
+                          <a:latin typeface="Segoe UI"/>
+                        </a:defRPr>
+                      </a:pPr>
+                      <a:r>
+                        <a:t>SARIMA (ACF/PACF Grid)</a:t>
+                      </a:r>
+                    </a:p>
+                  </a:txBody>
+                  <a:tcPr>
+                    <a:solidFill>
+                      <a:srgbClr val="FFFFFF"/>
+                    </a:solidFill>
+                  </a:tcPr>
+                </a:tc>
+                <a:tc>
+                  <a:txBody>
+                    <a:bodyPr wrap="square" lIns="54864" rIns="54864" tIns="54864" bIns="54864"/>
+                    <a:lstStyle/>
+                    <a:p>
+                      <a:pPr algn="ctr">
+                        <a:defRPr sz="1050">
+                          <a:solidFill>
+                            <a:srgbClr val="1D1F26"/>
+                          </a:solidFill>
+                          <a:latin typeface="Segoe UI"/>
+                        </a:defRPr>
+                      </a:pPr>
+                      <a:r>
+                        <a:t>5.4% ± 4.1%</a:t>
+                      </a:r>
+                    </a:p>
+                  </a:txBody>
+                  <a:tcPr>
+                    <a:solidFill>
+                      <a:srgbClr val="FFFFFF"/>
+                    </a:solidFill>
+                  </a:tcPr>
+                </a:tc>
+                <a:tc>
+                  <a:txBody>
+                    <a:bodyPr wrap="square" lIns="54864" rIns="54864" tIns="54864" bIns="54864"/>
+                    <a:lstStyle/>
+                    <a:p>
+                      <a:pPr algn="ctr">
+                        <a:defRPr sz="1050">
+                          <a:solidFill>
+                            <a:srgbClr val="1D1F26"/>
+                          </a:solidFill>
+                          <a:latin typeface="Segoe UI"/>
+                        </a:defRPr>
+                      </a:pPr>
+                      <a:r>
+                        <a:t>14.3% ± 10.3%</a:t>
+                      </a:r>
+                    </a:p>
+                  </a:txBody>
+                  <a:tcPr>
+                    <a:solidFill>
+                      <a:srgbClr val="FFFFFF"/>
+                    </a:solidFill>
+                  </a:tcPr>
+                </a:tc>
+                <a:tc>
+                  <a:txBody>
+                    <a:bodyPr wrap="square" lIns="54864" rIns="54864" tIns="54864" bIns="54864"/>
+                    <a:lstStyle/>
+                    <a:p>
+                      <a:pPr algn="ctr">
+                        <a:defRPr sz="1050">
+                          <a:solidFill>
+                            <a:srgbClr val="1D1F26"/>
+                          </a:solidFill>
+                          <a:latin typeface="Segoe UI"/>
+                        </a:defRPr>
+                      </a:pPr>
+                      <a:r>
+                        <a:t>24.7% ± 20.9%</a:t>
+                      </a:r>
+                    </a:p>
+                  </a:txBody>
+                  <a:tcPr>
+                    <a:solidFill>
+                      <a:srgbClr val="FFFFFF"/>
+                    </a:solidFill>
+                  </a:tcPr>
+                </a:tc>
+                <a:tc>
+                  <a:txBody>
+                    <a:bodyPr wrap="square" lIns="54864" rIns="54864" tIns="54864" bIns="54864"/>
+                    <a:lstStyle/>
+                    <a:p>
+                      <a:pPr algn="ctr">
+                        <a:defRPr sz="1050">
+                          <a:solidFill>
+                            <a:srgbClr val="1D1F26"/>
+                          </a:solidFill>
+                          <a:latin typeface="Segoe UI"/>
+                        </a:defRPr>
+                      </a:pPr>
+                      <a:r>
+                        <a:t>39.6% ± 35.5%</a:t>
+                      </a:r>
+                    </a:p>
+                  </a:txBody>
+                  <a:tcPr>
+                    <a:solidFill>
+                      <a:srgbClr val="FFFFFF"/>
+                    </a:solidFill>
+                  </a:tcPr>
+                </a:tc>
+              </a:tr>
+              <a:tr h="601980">
+                <a:tc>
+                  <a:txBody>
+                    <a:bodyPr wrap="square" lIns="54864" rIns="54864" tIns="54864" bIns="54864"/>
+                    <a:lstStyle/>
+                    <a:p>
+                      <a:pPr algn="l">
+                        <a:defRPr sz="1050" b="1">
+                          <a:solidFill>
+                            <a:srgbClr val="1D1F26"/>
+                          </a:solidFill>
+                          <a:latin typeface="Segoe UI"/>
+                        </a:defRPr>
+                      </a:pPr>
+                      <a:r>
+                        <a:t>Holt-Winters Exp Smooth</a:t>
+                      </a:r>
+                    </a:p>
+                  </a:txBody>
+                  <a:tcPr>
+                    <a:solidFill>
+                      <a:srgbClr val="F5F7FB"/>
+                    </a:solidFill>
+                  </a:tcPr>
+                </a:tc>
+                <a:tc>
+                  <a:txBody>
+                    <a:bodyPr wrap="square" lIns="54864" rIns="54864" tIns="54864" bIns="54864"/>
+                    <a:lstStyle/>
+                    <a:p>
+                      <a:pPr algn="ctr">
+                        <a:defRPr sz="1050">
+                          <a:solidFill>
+                            <a:srgbClr val="1D1F26"/>
+                          </a:solidFill>
+                          <a:latin typeface="Segoe UI"/>
+                        </a:defRPr>
+                      </a:pPr>
+                      <a:r>
+                        <a:t>13.0% ± 9.2%</a:t>
+                      </a:r>
+                    </a:p>
+                  </a:txBody>
+                  <a:tcPr>
+                    <a:solidFill>
+                      <a:srgbClr val="F5F7FB"/>
+                    </a:solidFill>
+                  </a:tcPr>
+                </a:tc>
+                <a:tc>
+                  <a:txBody>
+                    <a:bodyPr wrap="square" lIns="54864" rIns="54864" tIns="54864" bIns="54864"/>
+                    <a:lstStyle/>
+                    <a:p>
+                      <a:pPr algn="ctr">
+                        <a:defRPr sz="1050">
+                          <a:solidFill>
+                            <a:srgbClr val="1D1F26"/>
+                          </a:solidFill>
+                          <a:latin typeface="Segoe UI"/>
+                        </a:defRPr>
+                      </a:pPr>
+                      <a:r>
+                        <a:t>17.6% ± 10.4%</a:t>
+                      </a:r>
+                    </a:p>
+                  </a:txBody>
+                  <a:tcPr>
+                    <a:solidFill>
+                      <a:srgbClr val="F5F7FB"/>
+                    </a:solidFill>
+                  </a:tcPr>
+                </a:tc>
+                <a:tc>
+                  <a:txBody>
+                    <a:bodyPr wrap="square" lIns="54864" rIns="54864" tIns="54864" bIns="54864"/>
+                    <a:lstStyle/>
+                    <a:p>
+                      <a:pPr algn="ctr">
+                        <a:defRPr sz="1050">
+                          <a:solidFill>
+                            <a:srgbClr val="1D1F26"/>
+                          </a:solidFill>
+                          <a:latin typeface="Segoe UI"/>
+                        </a:defRPr>
+                      </a:pPr>
+                      <a:r>
+                        <a:t>25.2% ± 18.2%</a:t>
+                      </a:r>
+                    </a:p>
+                  </a:txBody>
+                  <a:tcPr>
+                    <a:solidFill>
+                      <a:srgbClr val="F5F7FB"/>
+                    </a:solidFill>
+                  </a:tcPr>
+                </a:tc>
+                <a:tc>
+                  <a:txBody>
+                    <a:bodyPr wrap="square" lIns="54864" rIns="54864" tIns="54864" bIns="54864"/>
+                    <a:lstStyle/>
+                    <a:p>
+                      <a:pPr algn="ctr">
+                        <a:defRPr sz="1050">
+                          <a:solidFill>
+                            <a:srgbClr val="1D1F26"/>
+                          </a:solidFill>
+                          <a:latin typeface="Segoe UI"/>
+                        </a:defRPr>
+                      </a:pPr>
+                      <a:r>
+                        <a:t>38.4% ± 28.5%</a:t>
+                      </a:r>
+                    </a:p>
+                  </a:txBody>
+                  <a:tcPr>
+                    <a:solidFill>
+                      <a:srgbClr val="F5F7FB"/>
+                    </a:solidFill>
+                  </a:tcPr>
+                </a:tc>
+              </a:tr>
+              <a:tr h="601980">
+                <a:tc>
+                  <a:txBody>
+                    <a:bodyPr wrap="square" lIns="54864" rIns="54864" tIns="54864" bIns="54864"/>
+                    <a:lstStyle/>
+                    <a:p>
+                      <a:pPr algn="l">
+                        <a:defRPr sz="1050" b="1">
                           <a:solidFill>
                             <a:srgbClr val="1D1F26"/>
                           </a:solidFill>
@@ -14896,7 +15404,7 @@
                     <a:lstStyle/>
                     <a:p>
                       <a:pPr algn="ctr">
-                        <a:defRPr sz="850">
+                        <a:defRPr sz="1050">
                           <a:solidFill>
                             <a:srgbClr val="1D1F26"/>
                           </a:solidFill>
@@ -14904,7 +15412,7 @@
                         </a:defRPr>
                       </a:pPr>
                       <a:r>
-                        <a:t>12.45% ± 5.8%</a:t>
+                        <a:t>14.0% ± 8.9%</a:t>
                       </a:r>
                     </a:p>
                   </a:txBody>
@@ -14920,7 +15428,7 @@
                     <a:lstStyle/>
                     <a:p>
                       <a:pPr algn="ctr">
-                        <a:defRPr sz="850">
+                        <a:defRPr sz="1050">
                           <a:solidFill>
                             <a:srgbClr val="1D1F26"/>
                           </a:solidFill>
@@ -14928,7 +15436,7 @@
                         </a:defRPr>
                       </a:pPr>
                       <a:r>
-                        <a:t>18.92% ± 8.4%</a:t>
+                        <a:t>19.9% ± 14.8%</a:t>
                       </a:r>
                     </a:p>
                   </a:txBody>
@@ -14944,7 +15452,7 @@
                     <a:lstStyle/>
                     <a:p>
                       <a:pPr algn="ctr">
-                        <a:defRPr sz="850">
+                        <a:defRPr sz="1050">
                           <a:solidFill>
                             <a:srgbClr val="1D1F26"/>
                           </a:solidFill>
@@ -14952,7 +15460,7 @@
                         </a:defRPr>
                       </a:pPr>
                       <a:r>
-                        <a:t>27.34% ± 12.6%</a:t>
+                        <a:t>26.7% ± 18.5%</a:t>
                       </a:r>
                     </a:p>
                   </a:txBody>
@@ -14968,7 +15476,7 @@
                     <a:lstStyle/>
                     <a:p>
                       <a:pPr algn="ctr">
-                        <a:defRPr sz="850">
+                        <a:defRPr sz="1050">
                           <a:solidFill>
                             <a:srgbClr val="1D1F26"/>
                           </a:solidFill>
@@ -14976,7 +15484,7 @@
                         </a:defRPr>
                       </a:pPr>
                       <a:r>
-                        <a:t>39.34% ± 25.4%</a:t>
+                        <a:t>38.3% ± 26.0%</a:t>
                       </a:r>
                     </a:p>
                   </a:txBody>
@@ -14987,14 +15495,14 @@
                   </a:tcPr>
                 </a:tc>
               </a:tr>
-              <a:tr h="594360">
+              <a:tr h="601980">
                 <a:tc>
                   <a:txBody>
                     <a:bodyPr wrap="square" lIns="54864" rIns="54864" tIns="54864" bIns="54864"/>
                     <a:lstStyle/>
                     <a:p>
                       <a:pPr algn="l">
-                        <a:defRPr sz="850" b="1">
+                        <a:defRPr sz="1050" b="1">
                           <a:solidFill>
                             <a:srgbClr val="1D1F26"/>
                           </a:solidFill>
@@ -15002,7 +15510,7 @@
                         </a:defRPr>
                       </a:pPr>
                       <a:r>
-                        <a:t>Holt-Winters Exp Smooth</a:t>
+                        <a:t>Naive Seasonal (t−12)</a:t>
                       </a:r>
                     </a:p>
                   </a:txBody>
@@ -15018,7 +15526,7 @@
                     <a:lstStyle/>
                     <a:p>
                       <a:pPr algn="ctr">
-                        <a:defRPr sz="850">
+                        <a:defRPr sz="1050">
                           <a:solidFill>
                             <a:srgbClr val="1D1F26"/>
                           </a:solidFill>
@@ -15026,7 +15534,7 @@
                         </a:defRPr>
                       </a:pPr>
                       <a:r>
-                        <a:t>13.82% ± 6.2%</a:t>
+                        <a:t>39.5% ± 31.9%</a:t>
                       </a:r>
                     </a:p>
                   </a:txBody>
@@ -15042,7 +15550,7 @@
                     <a:lstStyle/>
                     <a:p>
                       <a:pPr algn="ctr">
-                        <a:defRPr sz="850">
+                        <a:defRPr sz="1050">
                           <a:solidFill>
                             <a:srgbClr val="1D1F26"/>
                           </a:solidFill>
@@ -15050,7 +15558,7 @@
                         </a:defRPr>
                       </a:pPr>
                       <a:r>
-                        <a:t>20.15% ± 9.1%</a:t>
+                        <a:t>40.1% ± 31.3%</a:t>
                       </a:r>
                     </a:p>
                   </a:txBody>
@@ -15066,7 +15574,7 @@
                     <a:lstStyle/>
                     <a:p>
                       <a:pPr algn="ctr">
-                        <a:defRPr sz="850">
+                        <a:defRPr sz="1050">
                           <a:solidFill>
                             <a:srgbClr val="1D1F26"/>
                           </a:solidFill>
@@ -15074,7 +15582,7 @@
                         </a:defRPr>
                       </a:pPr>
                       <a:r>
-                        <a:t>28.90% ± 13.8%</a:t>
+                        <a:t>48.5% ± 35.4%</a:t>
                       </a:r>
                     </a:p>
                   </a:txBody>
@@ -15090,7 +15598,7 @@
                     <a:lstStyle/>
                     <a:p>
                       <a:pPr algn="ctr">
-                        <a:defRPr sz="850">
+                        <a:defRPr sz="1050">
                           <a:solidFill>
                             <a:srgbClr val="1D1F26"/>
                           </a:solidFill>
@@ -15098,7 +15606,7 @@
                         </a:defRPr>
                       </a:pPr>
                       <a:r>
-                        <a:t>39.57% ± 27.6%</a:t>
+                        <a:t>51.7% ± 24.5%</a:t>
                       </a:r>
                     </a:p>
                   </a:txBody>
@@ -15109,258 +15617,14 @@
                   </a:tcPr>
                 </a:tc>
               </a:tr>
-              <a:tr h="594360">
+              <a:tr h="601980">
                 <a:tc>
                   <a:txBody>
                     <a:bodyPr wrap="square" lIns="54864" rIns="54864" tIns="54864" bIns="54864"/>
                     <a:lstStyle/>
                     <a:p>
                       <a:pPr algn="l">
-                        <a:defRPr sz="850" b="1">
-                          <a:solidFill>
-                            <a:srgbClr val="1D1F26"/>
-                          </a:solidFill>
-                          <a:latin typeface="Segoe UI"/>
-                        </a:defRPr>
-                      </a:pPr>
-                      <a:r>
-                        <a:t>SARIMA (1,1,1)(0,0,0)</a:t>
-                      </a:r>
-                    </a:p>
-                  </a:txBody>
-                  <a:tcPr>
-                    <a:solidFill>
-                      <a:srgbClr val="FFFFFF"/>
-                    </a:solidFill>
-                  </a:tcPr>
-                </a:tc>
-                <a:tc>
-                  <a:txBody>
-                    <a:bodyPr wrap="square" lIns="54864" rIns="54864" tIns="54864" bIns="54864"/>
-                    <a:lstStyle/>
-                    <a:p>
-                      <a:pPr algn="ctr">
-                        <a:defRPr sz="850">
-                          <a:solidFill>
-                            <a:srgbClr val="1D1F26"/>
-                          </a:solidFill>
-                          <a:latin typeface="Segoe UI"/>
-                        </a:defRPr>
-                      </a:pPr>
-                      <a:r>
-                        <a:t>14.10% ± 7.4%</a:t>
-                      </a:r>
-                    </a:p>
-                  </a:txBody>
-                  <a:tcPr>
-                    <a:solidFill>
-                      <a:srgbClr val="FFFFFF"/>
-                    </a:solidFill>
-                  </a:tcPr>
-                </a:tc>
-                <a:tc>
-                  <a:txBody>
-                    <a:bodyPr wrap="square" lIns="54864" rIns="54864" tIns="54864" bIns="54864"/>
-                    <a:lstStyle/>
-                    <a:p>
-                      <a:pPr algn="ctr">
-                        <a:defRPr sz="850">
-                          <a:solidFill>
-                            <a:srgbClr val="1D1F26"/>
-                          </a:solidFill>
-                          <a:latin typeface="Segoe UI"/>
-                        </a:defRPr>
-                      </a:pPr>
-                      <a:r>
-                        <a:t>21.50% ± 11.2%</a:t>
-                      </a:r>
-                    </a:p>
-                  </a:txBody>
-                  <a:tcPr>
-                    <a:solidFill>
-                      <a:srgbClr val="FFFFFF"/>
-                    </a:solidFill>
-                  </a:tcPr>
-                </a:tc>
-                <a:tc>
-                  <a:txBody>
-                    <a:bodyPr wrap="square" lIns="54864" rIns="54864" tIns="54864" bIns="54864"/>
-                    <a:lstStyle/>
-                    <a:p>
-                      <a:pPr algn="ctr">
-                        <a:defRPr sz="850">
-                          <a:solidFill>
-                            <a:srgbClr val="1D1F26"/>
-                          </a:solidFill>
-                          <a:latin typeface="Segoe UI"/>
-                        </a:defRPr>
-                      </a:pPr>
-                      <a:r>
-                        <a:t>30.45% ± 16.5%</a:t>
-                      </a:r>
-                    </a:p>
-                  </a:txBody>
-                  <a:tcPr>
-                    <a:solidFill>
-                      <a:srgbClr val="FFFFFF"/>
-                    </a:solidFill>
-                  </a:tcPr>
-                </a:tc>
-                <a:tc>
-                  <a:txBody>
-                    <a:bodyPr wrap="square" lIns="54864" rIns="54864" tIns="54864" bIns="54864"/>
-                    <a:lstStyle/>
-                    <a:p>
-                      <a:pPr algn="ctr">
-                        <a:defRPr sz="850">
-                          <a:solidFill>
-                            <a:srgbClr val="1D1F26"/>
-                          </a:solidFill>
-                          <a:latin typeface="Segoe UI"/>
-                        </a:defRPr>
-                      </a:pPr>
-                      <a:r>
-                        <a:t>40.10% ± 34.5%</a:t>
-                      </a:r>
-                    </a:p>
-                  </a:txBody>
-                  <a:tcPr>
-                    <a:solidFill>
-                      <a:srgbClr val="FFFFFF"/>
-                    </a:solidFill>
-                  </a:tcPr>
-                </a:tc>
-              </a:tr>
-              <a:tr h="594360">
-                <a:tc>
-                  <a:txBody>
-                    <a:bodyPr wrap="square" lIns="54864" rIns="54864" tIns="54864" bIns="54864"/>
-                    <a:lstStyle/>
-                    <a:p>
-                      <a:pPr algn="l">
-                        <a:defRPr sz="850" b="1">
-                          <a:solidFill>
-                            <a:srgbClr val="1D1F26"/>
-                          </a:solidFill>
-                          <a:latin typeface="Segoe UI"/>
-                        </a:defRPr>
-                      </a:pPr>
-                      <a:r>
-                        <a:t>Naive Seasonal (t-12)</a:t>
-                      </a:r>
-                    </a:p>
-                  </a:txBody>
-                  <a:tcPr>
-                    <a:solidFill>
-                      <a:srgbClr val="F5F7FB"/>
-                    </a:solidFill>
-                  </a:tcPr>
-                </a:tc>
-                <a:tc>
-                  <a:txBody>
-                    <a:bodyPr wrap="square" lIns="54864" rIns="54864" tIns="54864" bIns="54864"/>
-                    <a:lstStyle/>
-                    <a:p>
-                      <a:pPr algn="ctr">
-                        <a:defRPr sz="850">
-                          <a:solidFill>
-                            <a:srgbClr val="1D1F26"/>
-                          </a:solidFill>
-                          <a:latin typeface="Segoe UI"/>
-                        </a:defRPr>
-                      </a:pPr>
-                      <a:r>
-                        <a:t>19.85% ± 9.5%</a:t>
-                      </a:r>
-                    </a:p>
-                  </a:txBody>
-                  <a:tcPr>
-                    <a:solidFill>
-                      <a:srgbClr val="F5F7FB"/>
-                    </a:solidFill>
-                  </a:tcPr>
-                </a:tc>
-                <a:tc>
-                  <a:txBody>
-                    <a:bodyPr wrap="square" lIns="54864" rIns="54864" tIns="54864" bIns="54864"/>
-                    <a:lstStyle/>
-                    <a:p>
-                      <a:pPr algn="ctr">
-                        <a:defRPr sz="850">
-                          <a:solidFill>
-                            <a:srgbClr val="1D1F26"/>
-                          </a:solidFill>
-                          <a:latin typeface="Segoe UI"/>
-                        </a:defRPr>
-                      </a:pPr>
-                      <a:r>
-                        <a:t>29.40% ± 14.2%</a:t>
-                      </a:r>
-                    </a:p>
-                  </a:txBody>
-                  <a:tcPr>
-                    <a:solidFill>
-                      <a:srgbClr val="F5F7FB"/>
-                    </a:solidFill>
-                  </a:tcPr>
-                </a:tc>
-                <a:tc>
-                  <a:txBody>
-                    <a:bodyPr wrap="square" lIns="54864" rIns="54864" tIns="54864" bIns="54864"/>
-                    <a:lstStyle/>
-                    <a:p>
-                      <a:pPr algn="ctr">
-                        <a:defRPr sz="850">
-                          <a:solidFill>
-                            <a:srgbClr val="1D1F26"/>
-                          </a:solidFill>
-                          <a:latin typeface="Segoe UI"/>
-                        </a:defRPr>
-                      </a:pPr>
-                      <a:r>
-                        <a:t>38.20% ± 18.9%</a:t>
-                      </a:r>
-                    </a:p>
-                  </a:txBody>
-                  <a:tcPr>
-                    <a:solidFill>
-                      <a:srgbClr val="F5F7FB"/>
-                    </a:solidFill>
-                  </a:tcPr>
-                </a:tc>
-                <a:tc>
-                  <a:txBody>
-                    <a:bodyPr wrap="square" lIns="54864" rIns="54864" tIns="54864" bIns="54864"/>
-                    <a:lstStyle/>
-                    <a:p>
-                      <a:pPr algn="ctr">
-                        <a:defRPr sz="850">
-                          <a:solidFill>
-                            <a:srgbClr val="1D1F26"/>
-                          </a:solidFill>
-                          <a:latin typeface="Segoe UI"/>
-                        </a:defRPr>
-                      </a:pPr>
-                      <a:r>
-                        <a:t>51.34% ± 24.5%</a:t>
-                      </a:r>
-                    </a:p>
-                  </a:txBody>
-                  <a:tcPr>
-                    <a:solidFill>
-                      <a:srgbClr val="F5F7FB"/>
-                    </a:solidFill>
-                  </a:tcPr>
-                </a:tc>
-              </a:tr>
-              <a:tr h="594360">
-                <a:tc>
-                  <a:txBody>
-                    <a:bodyPr wrap="square" lIns="54864" rIns="54864" tIns="54864" bIns="54864"/>
-                    <a:lstStyle/>
-                    <a:p>
-                      <a:pPr algn="l">
-                        <a:defRPr sz="850" b="1">
+                        <a:defRPr sz="1050" b="1">
                           <a:solidFill>
                             <a:srgbClr val="1D1F26"/>
                           </a:solidFill>
@@ -15384,7 +15648,7 @@
                     <a:lstStyle/>
                     <a:p>
                       <a:pPr algn="ctr">
-                        <a:defRPr sz="850">
+                        <a:defRPr sz="1050">
                           <a:solidFill>
                             <a:srgbClr val="1D1F26"/>
                           </a:solidFill>
@@ -15392,7 +15656,7 @@
                         </a:defRPr>
                       </a:pPr>
                       <a:r>
-                        <a:t>22.30% ± 11.0%</a:t>
+                        <a:t>42.9% ± 26.0%</a:t>
                       </a:r>
                     </a:p>
                   </a:txBody>
@@ -15408,7 +15672,7 @@
                     <a:lstStyle/>
                     <a:p>
                       <a:pPr algn="ctr">
-                        <a:defRPr sz="850">
+                        <a:defRPr sz="1050">
                           <a:solidFill>
                             <a:srgbClr val="1D1F26"/>
                           </a:solidFill>
@@ -15416,7 +15680,7 @@
                         </a:defRPr>
                       </a:pPr>
                       <a:r>
-                        <a:t>33.15% ± 16.8%</a:t>
+                        <a:t>42.7% ± 26.0%</a:t>
                       </a:r>
                     </a:p>
                   </a:txBody>
@@ -15432,7 +15696,7 @@
                     <a:lstStyle/>
                     <a:p>
                       <a:pPr algn="ctr">
-                        <a:defRPr sz="850">
+                        <a:defRPr sz="1050">
                           <a:solidFill>
                             <a:srgbClr val="1D1F26"/>
                           </a:solidFill>
@@ -15440,7 +15704,7 @@
                         </a:defRPr>
                       </a:pPr>
                       <a:r>
-                        <a:t>45.80% ± 22.4%</a:t>
+                        <a:t>51.3% ± 31.9%</a:t>
                       </a:r>
                     </a:p>
                   </a:txBody>
@@ -15456,7 +15720,7 @@
                     <a:lstStyle/>
                     <a:p>
                       <a:pPr algn="ctr">
-                        <a:defRPr sz="850">
+                        <a:defRPr sz="1050">
                           <a:solidFill>
                             <a:srgbClr val="1D1F26"/>
                           </a:solidFill>
@@ -15464,7 +15728,7 @@
                         </a:defRPr>
                       </a:pPr>
                       <a:r>
-                        <a:t>63.81% ± 35.5%</a:t>
+                        <a:t>64.2% ± 35.4%</a:t>
                       </a:r>
                     </a:p>
                   </a:txBody>
@@ -15564,76 +15828,101 @@
           <a:p>
             <a:pPr>
               <a:spcAft>
-                <a:spcPts val="800"/>
+                <a:spcPts val="600"/>
               </a:spcAft>
             </a:pPr>
             <a:r>
-              <a:rPr sz="1000" b="1">
+              <a:rPr sz="1150" b="1">
                 <a:solidFill>
                   <a:srgbClr val="3A58E4"/>
                 </a:solidFill>
                 <a:latin typeface="Segoe UI"/>
               </a:rPr>
-              <a:t>• XGBoost Wins Citywide: </a:t>
-            </a:r>
-            <a:r>
-              <a:rPr sz="919">
+              <a:t>• Horizons: </a:t>
+            </a:r>
+            <a:r>
+              <a:rPr sz="1100">
                 <a:solidFill>
                   <a:srgbClr val="1D1F26"/>
                 </a:solidFill>
                 <a:latin typeface="Segoe UI"/>
               </a:rPr>
-              <a:t>Achieved lowest 12-month CV error (39.34%) and best 2025 hold-out performance (38.48%). Non-linear decision trees capture rapid velocity shifts without linear divergence.</a:t>
+              <a:t>SARIMA wins short-term (5.4% MAPE). XGBoost ties at 12-months (38.3%).</a:t>
             </a:r>
           </a:p>
           <a:p>
             <a:pPr>
               <a:spcAft>
-                <a:spcPts val="800"/>
+                <a:spcPts val="600"/>
               </a:spcAft>
             </a:pPr>
             <a:r>
-              <a:rPr sz="1000" b="1">
+              <a:rPr sz="1150" b="1">
                 <a:solidFill>
                   <a:srgbClr val="3A58E4"/>
                 </a:solidFill>
                 <a:latin typeface="Segoe UI"/>
               </a:rPr>
-              <a:t>• Holt-Winters as Parametric Anchor: </a:t>
-            </a:r>
-            <a:r>
-              <a:rPr sz="919">
+              <a:t>• Champion Model: </a:t>
+            </a:r>
+            <a:r>
+              <a:rPr sz="1100">
                 <a:solidFill>
                   <a:srgbClr val="1D1F26"/>
                 </a:solidFill>
                 <a:latin typeface="Segoe UI"/>
               </a:rPr>
-              <a:t>Holt-Winters achieved virtually tied accuracy (39.57%), serving as our secondary baseline to provide closed-form analytical prediction intervals.</a:t>
+              <a:t>XGBoost chosen for lowest error and strong 2025 hold-out (8.5%).</a:t>
             </a:r>
           </a:p>
           <a:p>
             <a:pPr>
               <a:spcAft>
-                <a:spcPts val="800"/>
+                <a:spcPts val="600"/>
               </a:spcAft>
             </a:pPr>
             <a:r>
-              <a:rPr sz="1000" b="1">
+              <a:rPr sz="1150" b="1">
                 <a:solidFill>
                   <a:srgbClr val="3A58E4"/>
                 </a:solidFill>
                 <a:latin typeface="Segoe UI"/>
               </a:rPr>
-              <a:t>• Why Prophet Failed: </a:t>
-            </a:r>
-            <a:r>
-              <a:rPr sz="919">
+              <a:t>• Baseline Check: </a:t>
+            </a:r>
+            <a:r>
+              <a:rPr sz="1100">
                 <a:solidFill>
                   <a:srgbClr val="1D1F26"/>
                 </a:solidFill>
                 <a:latin typeface="Segoe UI"/>
               </a:rPr>
-              <a:t>Prophet's Bayesian changepoints overshot post-2023 counts by +63.8%, failing to adapt to the camping ordinance inflection. Fixed changepoint models should NOT be used for policy stress testing.</a:t>
+              <a:t>Naive seasonal performed well in 2025, proving baselines are critical.</a:t>
+            </a:r>
+          </a:p>
+          <a:p>
+            <a:pPr>
+              <a:spcAft>
+                <a:spcPts val="600"/>
+              </a:spcAft>
+            </a:pPr>
+            <a:r>
+              <a:rPr sz="1150" b="1">
+                <a:solidFill>
+                  <a:srgbClr val="3A58E4"/>
+                </a:solidFill>
+                <a:latin typeface="Segoe UI"/>
+              </a:rPr>
+              <a:t>• Prophet Failure: </a:t>
+            </a:r>
+            <a:r>
+              <a:rPr sz="1100">
+                <a:solidFill>
+                  <a:srgbClr val="1D1F26"/>
+                </a:solidFill>
+                <a:latin typeface="Segoe UI"/>
+              </a:rPr>
+              <a:t>Prophet failed (64.2% error) as it missed the post-peak drop.</a:t>
             </a:r>
           </a:p>
         </p:txBody>
@@ -15821,7 +16110,7 @@
               <a:spcAft>
                 <a:spcPts val="200"/>
               </a:spcAft>
-              <a:defRPr sz="1000" b="1">
+              <a:defRPr sz="1200" b="1">
                 <a:solidFill>
                   <a:srgbClr val="3A58E4"/>
                 </a:solidFill>
@@ -15842,7 +16131,7 @@
               </a:defRPr>
             </a:pPr>
             <a:r>
-              <a:t>2026 Forward Outlook: Stress-Testing Three Strategic Policy Scenarios</a:t>
+              <a:t>2026 Outlook: Stress-Testing Scenarios</a:t>
             </a:r>
           </a:p>
         </p:txBody>
@@ -16163,22 +16452,22 @@
               </a:spcAft>
             </a:pPr>
             <a:r>
-              <a:rPr sz="1000" b="1">
+              <a:rPr sz="1200" b="1">
                 <a:solidFill>
                   <a:srgbClr val="3A58E4"/>
                 </a:solidFill>
                 <a:latin typeface="Segoe UI"/>
               </a:rPr>
-              <a:t>• Baseline (Status Quo): </a:t>
-            </a:r>
-            <a:r>
-              <a:rPr sz="919">
+              <a:t>• Baseline: </a:t>
+            </a:r>
+            <a:r>
+              <a:rPr sz="1120">
                 <a:solidFill>
                   <a:srgbClr val="1D1F26"/>
                 </a:solidFill>
                 <a:latin typeface="Segoe UI"/>
               </a:rPr>
-              <a:t>Monthly counts projected to remain range-bound between 850 and 920 individuals (Month 12: 890). Assumes current shelter turnover and enforcement levels.</a:t>
+              <a:t>Expected to remain range-bound at 816–896 individuals.</a:t>
             </a:r>
           </a:p>
           <a:p>
@@ -16188,22 +16477,22 @@
               </a:spcAft>
             </a:pPr>
             <a:r>
-              <a:rPr sz="1000" b="1">
+              <a:rPr sz="1200" b="1">
                 <a:solidFill>
                   <a:srgbClr val="3A58E4"/>
                 </a:solidFill>
                 <a:latin typeface="Segoe UI"/>
               </a:rPr>
-              <a:t>• Optimistic Scenario (-24% at M12): </a:t>
-            </a:r>
-            <a:r>
-              <a:rPr sz="919">
+              <a:t>• Stress-Tests: </a:t>
+            </a:r>
+            <a:r>
+              <a:rPr sz="1120">
                 <a:solidFill>
                   <a:srgbClr val="1D1F26"/>
                 </a:solidFill>
                 <a:latin typeface="Segoe UI"/>
               </a:rPr>
-              <a:t>Accelerated Safe Sleeping Sites and 800 shelter beds drive downtown street counts down to ~670 individuals by December 2026.</a:t>
+              <a:t>Fixed scenario paths, not causal policy models.</a:t>
             </a:r>
           </a:p>
           <a:p>
@@ -16213,22 +16502,22 @@
               </a:spcAft>
             </a:pPr>
             <a:r>
-              <a:rPr sz="1000" b="1">
+              <a:rPr sz="1200" b="1">
                 <a:solidFill>
                   <a:srgbClr val="3A58E4"/>
                 </a:solidFill>
                 <a:latin typeface="Segoe UI"/>
               </a:rPr>
-              <a:t>• Pessimistic Scenario (+26% at M12): </a:t>
-            </a:r>
-            <a:r>
-              <a:rPr sz="919">
+              <a:t>• Optimistic: </a:t>
+            </a:r>
+            <a:r>
+              <a:rPr sz="1120">
                 <a:solidFill>
                   <a:srgbClr val="1D1F26"/>
                 </a:solidFill>
                 <a:latin typeface="Segoe UI"/>
               </a:rPr>
-              <a:t>Capacity exhaustion, shelter closures, and eviction spikes push counts back up to ~1,110 individuals by December 2026.</a:t>
+              <a:t>~675 individuals by Dec 2026 (favorable dynamics).</a:t>
             </a:r>
           </a:p>
           <a:p>
@@ -16238,22 +16527,47 @@
               </a:spcAft>
             </a:pPr>
             <a:r>
-              <a:rPr sz="1000" b="1">
+              <a:rPr sz="1200" b="1">
                 <a:solidFill>
                   <a:srgbClr val="3A58E4"/>
                 </a:solidFill>
                 <a:latin typeface="Segoe UI"/>
               </a:rPr>
-              <a:t>• The Necessity of Uncertainty Bands: </a:t>
-            </a:r>
-            <a:r>
-              <a:rPr sz="919">
+              <a:t>• Pessimistic: </a:t>
+            </a:r>
+            <a:r>
+              <a:rPr sz="1120">
                 <a:solidFill>
                   <a:srgbClr val="1D1F26"/>
                 </a:solidFill>
                 <a:latin typeface="Segoe UI"/>
               </a:rPr>
-              <a:t>Point forecasts without prediction intervals mislead decision-makers. Planning must accommodate the calibrated 80% and 95% fan envelopes.</a:t>
+              <a:t>~1,123 individuals by Dec 2026 (economic constraints).</a:t>
+            </a:r>
+          </a:p>
+          <a:p>
+            <a:pPr>
+              <a:spcAft>
+                <a:spcPts val="600"/>
+              </a:spcAft>
+            </a:pPr>
+            <a:r>
+              <a:rPr sz="1200" b="1">
+                <a:solidFill>
+                  <a:srgbClr val="3A58E4"/>
+                </a:solidFill>
+                <a:latin typeface="Segoe UI"/>
+              </a:rPr>
+              <a:t>• Range Planning: </a:t>
+            </a:r>
+            <a:r>
+              <a:rPr sz="1120">
+                <a:solidFill>
+                  <a:srgbClr val="1D1F26"/>
+                </a:solidFill>
+                <a:latin typeface="Segoe UI"/>
+              </a:rPr>
+              <a:t>Plan using uncertainty bands, not single points.</a:t>
             </a:r>
           </a:p>
         </p:txBody>
